--- a/Pregrado/Creatividad y pensamiento innovador/Clases/Sesion 04 - Tipos de innovación/Presentacion.pptx
+++ b/Pregrado/Creatividad y pensamiento innovador/Clases/Sesion 04 - Tipos de innovación/Presentacion.pptx
@@ -3362,41 +3362,6 @@
                 <a:latin typeface="Calibri"/>
               </a:rPr>
               <a:t> CREATIVIDAD Y PENSAMIENTO INNOVADOR</a:t>
-            </a:r>
-          </a:p>
-        </p:txBody>
-      </p:sp>
-      <p:sp>
-        <p:nvSpPr>
-          <p:cNvPr id="7" name="TextBox 6"/>
-          <p:cNvSpPr txBox="1"/>
-          <p:nvPr/>
-        </p:nvSpPr>
-        <p:spPr>
-          <a:xfrm>
-            <a:off x="2194560" y="6446520"/>
-            <a:ext cx="5943600" cy="274320"/>
-          </a:xfrm>
-          <a:prstGeom prst="rect">
-            <a:avLst/>
-          </a:prstGeom>
-          <a:noFill/>
-        </p:spPr>
-        <p:txBody>
-          <a:bodyPr wrap="square" anchor="t" lIns="0" rIns="0" tIns="0" bIns="0">
-            <a:spAutoFit/>
-          </a:bodyPr>
-          <a:lstStyle/>
-          <a:p>
-            <a:pPr algn="l"/>
-            <a:r>
-              <a:rPr sz="1000" b="1" i="0">
-                <a:solidFill>
-                  <a:srgbClr val="8F989D"/>
-                </a:solidFill>
-                <a:latin typeface="Calibri"/>
-              </a:rPr>
-              <a:t>Inicio 5:10 pm</a:t>
             </a:r>
           </a:p>
         </p:txBody>
@@ -4145,41 +4110,6 @@
         </p:nvSpPr>
         <p:spPr>
           <a:xfrm>
-            <a:off x="2194560" y="6446520"/>
-            <a:ext cx="5943600" cy="274320"/>
-          </a:xfrm>
-          <a:prstGeom prst="rect">
-            <a:avLst/>
-          </a:prstGeom>
-          <a:noFill/>
-        </p:spPr>
-        <p:txBody>
-          <a:bodyPr wrap="square" anchor="t" lIns="0" rIns="0" tIns="0" bIns="0">
-            <a:spAutoFit/>
-          </a:bodyPr>
-          <a:lstStyle/>
-          <a:p>
-            <a:pPr algn="l"/>
-            <a:r>
-              <a:rPr sz="1000" b="1" i="0">
-                <a:solidFill>
-                  <a:srgbClr val="8F989D"/>
-                </a:solidFill>
-                <a:latin typeface="Calibri"/>
-              </a:rPr>
-              <a:t>Inicio 5:10 pm</a:t>
-            </a:r>
-          </a:p>
-        </p:txBody>
-      </p:sp>
-      <p:sp>
-        <p:nvSpPr>
-          <p:cNvPr id="7" name="TextBox 6"/>
-          <p:cNvSpPr txBox="1"/>
-          <p:nvPr/>
-        </p:nvSpPr>
-        <p:spPr>
-          <a:xfrm>
             <a:off x="11094415" y="6446520"/>
             <a:ext cx="548640" cy="274320"/>
           </a:xfrm>
@@ -4705,41 +4635,6 @@
         </p:nvSpPr>
         <p:spPr>
           <a:xfrm>
-            <a:off x="2194560" y="6446520"/>
-            <a:ext cx="5943600" cy="274320"/>
-          </a:xfrm>
-          <a:prstGeom prst="rect">
-            <a:avLst/>
-          </a:prstGeom>
-          <a:noFill/>
-        </p:spPr>
-        <p:txBody>
-          <a:bodyPr wrap="square" anchor="t" lIns="0" rIns="0" tIns="0" bIns="0">
-            <a:spAutoFit/>
-          </a:bodyPr>
-          <a:lstStyle/>
-          <a:p>
-            <a:pPr algn="l"/>
-            <a:r>
-              <a:rPr sz="1000" b="1" i="0">
-                <a:solidFill>
-                  <a:srgbClr val="8F989D"/>
-                </a:solidFill>
-                <a:latin typeface="Calibri"/>
-              </a:rPr>
-              <a:t>Inicio 5:10 pm</a:t>
-            </a:r>
-          </a:p>
-        </p:txBody>
-      </p:sp>
-      <p:sp>
-        <p:nvSpPr>
-          <p:cNvPr id="6" name="TextBox 5"/>
-          <p:cNvSpPr txBox="1"/>
-          <p:nvPr/>
-        </p:nvSpPr>
-        <p:spPr>
-          <a:xfrm>
             <a:off x="11094415" y="6446520"/>
             <a:ext cx="548640" cy="274320"/>
           </a:xfrm>
@@ -5225,41 +5120,6 @@
         </p:nvSpPr>
         <p:spPr>
           <a:xfrm>
-            <a:off x="2194560" y="6446520"/>
-            <a:ext cx="5943600" cy="274320"/>
-          </a:xfrm>
-          <a:prstGeom prst="rect">
-            <a:avLst/>
-          </a:prstGeom>
-          <a:noFill/>
-        </p:spPr>
-        <p:txBody>
-          <a:bodyPr wrap="square" anchor="t" lIns="0" rIns="0" tIns="0" bIns="0">
-            <a:spAutoFit/>
-          </a:bodyPr>
-          <a:lstStyle/>
-          <a:p>
-            <a:pPr algn="l"/>
-            <a:r>
-              <a:rPr sz="1000" b="1" i="0">
-                <a:solidFill>
-                  <a:srgbClr val="8F989D"/>
-                </a:solidFill>
-                <a:latin typeface="Calibri"/>
-              </a:rPr>
-              <a:t>Inicio 5:10 pm</a:t>
-            </a:r>
-          </a:p>
-        </p:txBody>
-      </p:sp>
-      <p:sp>
-        <p:nvSpPr>
-          <p:cNvPr id="11" name="TextBox 10"/>
-          <p:cNvSpPr txBox="1"/>
-          <p:nvPr/>
-        </p:nvSpPr>
-        <p:spPr>
-          <a:xfrm>
             <a:off x="11094415" y="6446520"/>
             <a:ext cx="548640" cy="274320"/>
           </a:xfrm>
@@ -5727,41 +5587,6 @@
         </p:nvSpPr>
         <p:spPr>
           <a:xfrm>
-            <a:off x="2194560" y="6446520"/>
-            <a:ext cx="5943600" cy="274320"/>
-          </a:xfrm>
-          <a:prstGeom prst="rect">
-            <a:avLst/>
-          </a:prstGeom>
-          <a:noFill/>
-        </p:spPr>
-        <p:txBody>
-          <a:bodyPr wrap="square" anchor="t" lIns="0" rIns="0" tIns="0" bIns="0">
-            <a:spAutoFit/>
-          </a:bodyPr>
-          <a:lstStyle/>
-          <a:p>
-            <a:pPr algn="l"/>
-            <a:r>
-              <a:rPr sz="1000" b="1" i="0">
-                <a:solidFill>
-                  <a:srgbClr val="8F989D"/>
-                </a:solidFill>
-                <a:latin typeface="Calibri"/>
-              </a:rPr>
-              <a:t>Inicio 5:10 pm</a:t>
-            </a:r>
-          </a:p>
-        </p:txBody>
-      </p:sp>
-      <p:sp>
-        <p:nvSpPr>
-          <p:cNvPr id="11" name="TextBox 10"/>
-          <p:cNvSpPr txBox="1"/>
-          <p:nvPr/>
-        </p:nvSpPr>
-        <p:spPr>
-          <a:xfrm>
             <a:off x="11094415" y="6446520"/>
             <a:ext cx="548640" cy="274320"/>
           </a:xfrm>
@@ -6411,41 +6236,6 @@
         </p:nvSpPr>
         <p:spPr>
           <a:xfrm>
-            <a:off x="2194560" y="6446520"/>
-            <a:ext cx="5943600" cy="274320"/>
-          </a:xfrm>
-          <a:prstGeom prst="rect">
-            <a:avLst/>
-          </a:prstGeom>
-          <a:noFill/>
-        </p:spPr>
-        <p:txBody>
-          <a:bodyPr wrap="square" anchor="t" lIns="0" rIns="0" tIns="0" bIns="0">
-            <a:spAutoFit/>
-          </a:bodyPr>
-          <a:lstStyle/>
-          <a:p>
-            <a:pPr algn="l"/>
-            <a:r>
-              <a:rPr sz="1000" b="1" i="0">
-                <a:solidFill>
-                  <a:srgbClr val="8F989D"/>
-                </a:solidFill>
-                <a:latin typeface="Calibri"/>
-              </a:rPr>
-              <a:t>Inicio 5:10 pm</a:t>
-            </a:r>
-          </a:p>
-        </p:txBody>
-      </p:sp>
-      <p:sp>
-        <p:nvSpPr>
-          <p:cNvPr id="6" name="TextBox 5"/>
-          <p:cNvSpPr txBox="1"/>
-          <p:nvPr/>
-        </p:nvSpPr>
-        <p:spPr>
-          <a:xfrm>
             <a:off x="11094415" y="6446520"/>
             <a:ext cx="548640" cy="274320"/>
           </a:xfrm>
@@ -7043,41 +6833,6 @@
         </p:nvSpPr>
         <p:spPr>
           <a:xfrm>
-            <a:off x="2194560" y="6446520"/>
-            <a:ext cx="5943600" cy="274320"/>
-          </a:xfrm>
-          <a:prstGeom prst="rect">
-            <a:avLst/>
-          </a:prstGeom>
-          <a:noFill/>
-        </p:spPr>
-        <p:txBody>
-          <a:bodyPr wrap="square" anchor="t" lIns="0" rIns="0" tIns="0" bIns="0">
-            <a:spAutoFit/>
-          </a:bodyPr>
-          <a:lstStyle/>
-          <a:p>
-            <a:pPr algn="l"/>
-            <a:r>
-              <a:rPr sz="1000" b="1" i="0">
-                <a:solidFill>
-                  <a:srgbClr val="8F989D"/>
-                </a:solidFill>
-                <a:latin typeface="Calibri"/>
-              </a:rPr>
-              <a:t>Inicio 5:10 pm</a:t>
-            </a:r>
-          </a:p>
-        </p:txBody>
-      </p:sp>
-      <p:sp>
-        <p:nvSpPr>
-          <p:cNvPr id="6" name="TextBox 5"/>
-          <p:cNvSpPr txBox="1"/>
-          <p:nvPr/>
-        </p:nvSpPr>
-        <p:spPr>
-          <a:xfrm>
             <a:off x="11094415" y="6446520"/>
             <a:ext cx="548640" cy="274320"/>
           </a:xfrm>
@@ -7637,41 +7392,6 @@
         </p:nvSpPr>
         <p:spPr>
           <a:xfrm>
-            <a:off x="2194560" y="6446520"/>
-            <a:ext cx="5943600" cy="274320"/>
-          </a:xfrm>
-          <a:prstGeom prst="rect">
-            <a:avLst/>
-          </a:prstGeom>
-          <a:noFill/>
-        </p:spPr>
-        <p:txBody>
-          <a:bodyPr wrap="square" anchor="t" lIns="0" rIns="0" tIns="0" bIns="0">
-            <a:spAutoFit/>
-          </a:bodyPr>
-          <a:lstStyle/>
-          <a:p>
-            <a:pPr algn="l"/>
-            <a:r>
-              <a:rPr sz="1000" b="1" i="0">
-                <a:solidFill>
-                  <a:srgbClr val="8F989D"/>
-                </a:solidFill>
-                <a:latin typeface="Calibri"/>
-              </a:rPr>
-              <a:t>Inicio 5:10 pm</a:t>
-            </a:r>
-          </a:p>
-        </p:txBody>
-      </p:sp>
-      <p:sp>
-        <p:nvSpPr>
-          <p:cNvPr id="6" name="TextBox 5"/>
-          <p:cNvSpPr txBox="1"/>
-          <p:nvPr/>
-        </p:nvSpPr>
-        <p:spPr>
-          <a:xfrm>
             <a:off x="11094415" y="6446520"/>
             <a:ext cx="548640" cy="274320"/>
           </a:xfrm>
@@ -8066,41 +7786,6 @@
         </p:nvSpPr>
         <p:spPr>
           <a:xfrm>
-            <a:off x="2194560" y="6446520"/>
-            <a:ext cx="5943600" cy="274320"/>
-          </a:xfrm>
-          <a:prstGeom prst="rect">
-            <a:avLst/>
-          </a:prstGeom>
-          <a:noFill/>
-        </p:spPr>
-        <p:txBody>
-          <a:bodyPr wrap="square" anchor="t" lIns="0" rIns="0" tIns="0" bIns="0">
-            <a:spAutoFit/>
-          </a:bodyPr>
-          <a:lstStyle/>
-          <a:p>
-            <a:pPr algn="l"/>
-            <a:r>
-              <a:rPr sz="1000" b="1" i="0">
-                <a:solidFill>
-                  <a:srgbClr val="8F989D"/>
-                </a:solidFill>
-                <a:latin typeface="Calibri"/>
-              </a:rPr>
-              <a:t>Inicio 5:10 pm</a:t>
-            </a:r>
-          </a:p>
-        </p:txBody>
-      </p:sp>
-      <p:sp>
-        <p:nvSpPr>
-          <p:cNvPr id="6" name="TextBox 5"/>
-          <p:cNvSpPr txBox="1"/>
-          <p:nvPr/>
-        </p:nvSpPr>
-        <p:spPr>
-          <a:xfrm>
             <a:off x="11094415" y="6446520"/>
             <a:ext cx="548640" cy="274320"/>
           </a:xfrm>
@@ -8470,41 +8155,6 @@
         </p:nvSpPr>
         <p:spPr>
           <a:xfrm>
-            <a:off x="2194560" y="6446520"/>
-            <a:ext cx="5943600" cy="274320"/>
-          </a:xfrm>
-          <a:prstGeom prst="rect">
-            <a:avLst/>
-          </a:prstGeom>
-          <a:noFill/>
-        </p:spPr>
-        <p:txBody>
-          <a:bodyPr wrap="square" anchor="t" lIns="0" rIns="0" tIns="0" bIns="0">
-            <a:spAutoFit/>
-          </a:bodyPr>
-          <a:lstStyle/>
-          <a:p>
-            <a:pPr algn="l"/>
-            <a:r>
-              <a:rPr sz="1000" b="1" i="0">
-                <a:solidFill>
-                  <a:srgbClr val="8F989D"/>
-                </a:solidFill>
-                <a:latin typeface="Calibri"/>
-              </a:rPr>
-              <a:t>Inicio 5:10 pm</a:t>
-            </a:r>
-          </a:p>
-        </p:txBody>
-      </p:sp>
-      <p:sp>
-        <p:nvSpPr>
-          <p:cNvPr id="6" name="TextBox 5"/>
-          <p:cNvSpPr txBox="1"/>
-          <p:nvPr/>
-        </p:nvSpPr>
-        <p:spPr>
-          <a:xfrm>
             <a:off x="11094415" y="6446520"/>
             <a:ext cx="548640" cy="274320"/>
           </a:xfrm>
@@ -8751,41 +8401,6 @@
           </a:p>
         </p:txBody>
       </p:sp>
-      <p:sp>
-        <p:nvSpPr>
-          <p:cNvPr id="7" name="TextBox 6"/>
-          <p:cNvSpPr txBox="1"/>
-          <p:nvPr/>
-        </p:nvSpPr>
-        <p:spPr>
-          <a:xfrm>
-            <a:off x="2194560" y="6446520"/>
-            <a:ext cx="5943600" cy="274320"/>
-          </a:xfrm>
-          <a:prstGeom prst="rect">
-            <a:avLst/>
-          </a:prstGeom>
-          <a:noFill/>
-        </p:spPr>
-        <p:txBody>
-          <a:bodyPr wrap="square" anchor="t" lIns="0" rIns="0" tIns="0" bIns="0">
-            <a:spAutoFit/>
-          </a:bodyPr>
-          <a:lstStyle/>
-          <a:p>
-            <a:pPr algn="l"/>
-            <a:r>
-              <a:rPr sz="1000" b="1" i="0">
-                <a:solidFill>
-                  <a:srgbClr val="8F989D"/>
-                </a:solidFill>
-                <a:latin typeface="Calibri"/>
-              </a:rPr>
-              <a:t>Inicio 5:10 pm</a:t>
-            </a:r>
-          </a:p>
-        </p:txBody>
-      </p:sp>
     </p:spTree>
   </p:cSld>
   <p:clrMapOvr>
@@ -9158,41 +8773,6 @@
         </p:nvSpPr>
         <p:spPr>
           <a:xfrm>
-            <a:off x="2194560" y="6446520"/>
-            <a:ext cx="5943600" cy="274320"/>
-          </a:xfrm>
-          <a:prstGeom prst="rect">
-            <a:avLst/>
-          </a:prstGeom>
-          <a:noFill/>
-        </p:spPr>
-        <p:txBody>
-          <a:bodyPr wrap="square" anchor="t" lIns="0" rIns="0" tIns="0" bIns="0">
-            <a:spAutoFit/>
-          </a:bodyPr>
-          <a:lstStyle/>
-          <a:p>
-            <a:pPr algn="l"/>
-            <a:r>
-              <a:rPr sz="1000" b="1" i="0">
-                <a:solidFill>
-                  <a:srgbClr val="8F989D"/>
-                </a:solidFill>
-                <a:latin typeface="Calibri"/>
-              </a:rPr>
-              <a:t>Inicio 5:10 pm</a:t>
-            </a:r>
-          </a:p>
-        </p:txBody>
-      </p:sp>
-      <p:sp>
-        <p:nvSpPr>
-          <p:cNvPr id="6" name="TextBox 5"/>
-          <p:cNvSpPr txBox="1"/>
-          <p:nvPr/>
-        </p:nvSpPr>
-        <p:spPr>
-          <a:xfrm>
             <a:off x="11094415" y="6446520"/>
             <a:ext cx="548640" cy="274320"/>
           </a:xfrm>
@@ -9605,41 +9185,6 @@
       <p:sp>
         <p:nvSpPr>
           <p:cNvPr id="5" name="TextBox 4"/>
-          <p:cNvSpPr txBox="1"/>
-          <p:nvPr/>
-        </p:nvSpPr>
-        <p:spPr>
-          <a:xfrm>
-            <a:off x="2194560" y="6446520"/>
-            <a:ext cx="5943600" cy="274320"/>
-          </a:xfrm>
-          <a:prstGeom prst="rect">
-            <a:avLst/>
-          </a:prstGeom>
-          <a:noFill/>
-        </p:spPr>
-        <p:txBody>
-          <a:bodyPr wrap="square" anchor="t" lIns="0" rIns="0" tIns="0" bIns="0">
-            <a:spAutoFit/>
-          </a:bodyPr>
-          <a:lstStyle/>
-          <a:p>
-            <a:pPr algn="l"/>
-            <a:r>
-              <a:rPr sz="1000" b="1" i="0">
-                <a:solidFill>
-                  <a:srgbClr val="8F989D"/>
-                </a:solidFill>
-                <a:latin typeface="Calibri"/>
-              </a:rPr>
-              <a:t>Inicio 5:10 pm</a:t>
-            </a:r>
-          </a:p>
-        </p:txBody>
-      </p:sp>
-      <p:sp>
-        <p:nvSpPr>
-          <p:cNvPr id="6" name="TextBox 5"/>
           <p:cNvSpPr txBox="1"/>
           <p:nvPr/>
         </p:nvSpPr>
@@ -10272,41 +9817,6 @@
         </p:nvSpPr>
         <p:spPr>
           <a:xfrm>
-            <a:off x="2194560" y="6446520"/>
-            <a:ext cx="5943600" cy="274320"/>
-          </a:xfrm>
-          <a:prstGeom prst="rect">
-            <a:avLst/>
-          </a:prstGeom>
-          <a:noFill/>
-        </p:spPr>
-        <p:txBody>
-          <a:bodyPr wrap="square" anchor="t" lIns="0" rIns="0" tIns="0" bIns="0">
-            <a:spAutoFit/>
-          </a:bodyPr>
-          <a:lstStyle/>
-          <a:p>
-            <a:pPr algn="l"/>
-            <a:r>
-              <a:rPr sz="1000" b="1" i="0">
-                <a:solidFill>
-                  <a:srgbClr val="8F989D"/>
-                </a:solidFill>
-                <a:latin typeface="Calibri"/>
-              </a:rPr>
-              <a:t>Inicio 5:10 pm</a:t>
-            </a:r>
-          </a:p>
-        </p:txBody>
-      </p:sp>
-      <p:sp>
-        <p:nvSpPr>
-          <p:cNvPr id="7" name="TextBox 6"/>
-          <p:cNvSpPr txBox="1"/>
-          <p:nvPr/>
-        </p:nvSpPr>
-        <p:spPr>
-          <a:xfrm>
             <a:off x="11094415" y="6446520"/>
             <a:ext cx="548640" cy="274320"/>
           </a:xfrm>
@@ -10791,41 +10301,6 @@
       <p:sp>
         <p:nvSpPr>
           <p:cNvPr id="5" name="TextBox 4"/>
-          <p:cNvSpPr txBox="1"/>
-          <p:nvPr/>
-        </p:nvSpPr>
-        <p:spPr>
-          <a:xfrm>
-            <a:off x="2194560" y="6446520"/>
-            <a:ext cx="5943600" cy="274320"/>
-          </a:xfrm>
-          <a:prstGeom prst="rect">
-            <a:avLst/>
-          </a:prstGeom>
-          <a:noFill/>
-        </p:spPr>
-        <p:txBody>
-          <a:bodyPr wrap="square" anchor="t" lIns="0" rIns="0" tIns="0" bIns="0">
-            <a:spAutoFit/>
-          </a:bodyPr>
-          <a:lstStyle/>
-          <a:p>
-            <a:pPr algn="l"/>
-            <a:r>
-              <a:rPr sz="1000" b="1" i="0">
-                <a:solidFill>
-                  <a:srgbClr val="8F989D"/>
-                </a:solidFill>
-                <a:latin typeface="Calibri"/>
-              </a:rPr>
-              <a:t>Inicio 5:10 pm</a:t>
-            </a:r>
-          </a:p>
-        </p:txBody>
-      </p:sp>
-      <p:sp>
-        <p:nvSpPr>
-          <p:cNvPr id="6" name="TextBox 5"/>
           <p:cNvSpPr txBox="1"/>
           <p:nvPr/>
         </p:nvSpPr>
@@ -11592,41 +11067,6 @@
         </p:nvSpPr>
         <p:spPr>
           <a:xfrm>
-            <a:off x="2194560" y="6446520"/>
-            <a:ext cx="5943600" cy="274320"/>
-          </a:xfrm>
-          <a:prstGeom prst="rect">
-            <a:avLst/>
-          </a:prstGeom>
-          <a:noFill/>
-        </p:spPr>
-        <p:txBody>
-          <a:bodyPr wrap="square" anchor="t" lIns="0" rIns="0" tIns="0" bIns="0">
-            <a:spAutoFit/>
-          </a:bodyPr>
-          <a:lstStyle/>
-          <a:p>
-            <a:pPr algn="l"/>
-            <a:r>
-              <a:rPr sz="1000" b="1" i="0">
-                <a:solidFill>
-                  <a:srgbClr val="8F989D"/>
-                </a:solidFill>
-                <a:latin typeface="Calibri"/>
-              </a:rPr>
-              <a:t>Inicio 5:10 pm</a:t>
-            </a:r>
-          </a:p>
-        </p:txBody>
-      </p:sp>
-      <p:sp>
-        <p:nvSpPr>
-          <p:cNvPr id="7" name="TextBox 6"/>
-          <p:cNvSpPr txBox="1"/>
-          <p:nvPr/>
-        </p:nvSpPr>
-        <p:spPr>
-          <a:xfrm>
             <a:off x="11094415" y="6446520"/>
             <a:ext cx="548640" cy="274320"/>
           </a:xfrm>
@@ -12033,41 +11473,6 @@
         </p:nvSpPr>
         <p:spPr>
           <a:xfrm>
-            <a:off x="2194560" y="6446520"/>
-            <a:ext cx="5943600" cy="274320"/>
-          </a:xfrm>
-          <a:prstGeom prst="rect">
-            <a:avLst/>
-          </a:prstGeom>
-          <a:noFill/>
-        </p:spPr>
-        <p:txBody>
-          <a:bodyPr wrap="square" anchor="t" lIns="0" rIns="0" tIns="0" bIns="0">
-            <a:spAutoFit/>
-          </a:bodyPr>
-          <a:lstStyle/>
-          <a:p>
-            <a:pPr algn="l"/>
-            <a:r>
-              <a:rPr sz="1000" b="1" i="0">
-                <a:solidFill>
-                  <a:srgbClr val="8F989D"/>
-                </a:solidFill>
-                <a:latin typeface="Calibri"/>
-              </a:rPr>
-              <a:t>Inicio 5:10 pm</a:t>
-            </a:r>
-          </a:p>
-        </p:txBody>
-      </p:sp>
-      <p:sp>
-        <p:nvSpPr>
-          <p:cNvPr id="6" name="TextBox 5"/>
-          <p:cNvSpPr txBox="1"/>
-          <p:nvPr/>
-        </p:nvSpPr>
-        <p:spPr>
-          <a:xfrm>
             <a:off x="11094415" y="6446520"/>
             <a:ext cx="548640" cy="274320"/>
           </a:xfrm>
@@ -12539,41 +11944,6 @@
         </p:nvSpPr>
         <p:spPr>
           <a:xfrm>
-            <a:off x="2194560" y="6446520"/>
-            <a:ext cx="5943600" cy="274320"/>
-          </a:xfrm>
-          <a:prstGeom prst="rect">
-            <a:avLst/>
-          </a:prstGeom>
-          <a:noFill/>
-        </p:spPr>
-        <p:txBody>
-          <a:bodyPr wrap="square" anchor="t" lIns="0" rIns="0" tIns="0" bIns="0">
-            <a:spAutoFit/>
-          </a:bodyPr>
-          <a:lstStyle/>
-          <a:p>
-            <a:pPr algn="l"/>
-            <a:r>
-              <a:rPr sz="1000" b="1" i="0">
-                <a:solidFill>
-                  <a:srgbClr val="8F989D"/>
-                </a:solidFill>
-                <a:latin typeface="Calibri"/>
-              </a:rPr>
-              <a:t>Inicio 5:10 pm</a:t>
-            </a:r>
-          </a:p>
-        </p:txBody>
-      </p:sp>
-      <p:sp>
-        <p:nvSpPr>
-          <p:cNvPr id="6" name="TextBox 5"/>
-          <p:cNvSpPr txBox="1"/>
-          <p:nvPr/>
-        </p:nvSpPr>
-        <p:spPr>
-          <a:xfrm>
             <a:off x="11094415" y="6446520"/>
             <a:ext cx="548640" cy="274320"/>
           </a:xfrm>
@@ -12603,7 +11973,7 @@
       </p:sp>
       <p:sp>
         <p:nvSpPr>
-          <p:cNvPr id="7" name="TextBox 6"/>
+          <p:cNvPr id="6" name="TextBox 5"/>
           <p:cNvSpPr txBox="1"/>
           <p:nvPr/>
         </p:nvSpPr>
@@ -13090,41 +12460,6 @@
       <p:sp>
         <p:nvSpPr>
           <p:cNvPr id="5" name="TextBox 4"/>
-          <p:cNvSpPr txBox="1"/>
-          <p:nvPr/>
-        </p:nvSpPr>
-        <p:spPr>
-          <a:xfrm>
-            <a:off x="2194560" y="6446520"/>
-            <a:ext cx="5943600" cy="274320"/>
-          </a:xfrm>
-          <a:prstGeom prst="rect">
-            <a:avLst/>
-          </a:prstGeom>
-          <a:noFill/>
-        </p:spPr>
-        <p:txBody>
-          <a:bodyPr wrap="square" anchor="t" lIns="0" rIns="0" tIns="0" bIns="0">
-            <a:spAutoFit/>
-          </a:bodyPr>
-          <a:lstStyle/>
-          <a:p>
-            <a:pPr algn="l"/>
-            <a:r>
-              <a:rPr sz="1000" b="1" i="0">
-                <a:solidFill>
-                  <a:srgbClr val="8F989D"/>
-                </a:solidFill>
-                <a:latin typeface="Calibri"/>
-              </a:rPr>
-              <a:t>Inicio 5:10 pm</a:t>
-            </a:r>
-          </a:p>
-        </p:txBody>
-      </p:sp>
-      <p:sp>
-        <p:nvSpPr>
-          <p:cNvPr id="6" name="TextBox 5"/>
           <p:cNvSpPr txBox="1"/>
           <p:nvPr/>
         </p:nvSpPr>

--- a/Pregrado/Creatividad y pensamiento innovador/Clases/Sesion 04 - Tipos de innovación/Presentacion.pptx
+++ b/Pregrado/Creatividad y pensamiento innovador/Clases/Sesion 04 - Tipos de innovación/Presentacion.pptx
@@ -7318,7 +7318,7 @@
                 </a:solidFill>
                 <a:latin typeface="Calibri"/>
               </a:rPr>
-              <a:t>`S05_MatrizTipos_Apellido`</a:t>
+              <a:t>`S04_MatrizTipos_Apellido`</a:t>
             </a:r>
             <a:r>
               <a:rPr sz="1600" b="0" i="0">
@@ -7730,7 +7730,7 @@
                 </a:solidFill>
                 <a:latin typeface="Calibri"/>
               </a:rPr>
-              <a:t>`S05_MatrizTipos_Apellido`</a:t>
+              <a:t>`S04_MatrizTipos_Apellido`</a:t>
             </a:r>
             <a:r>
               <a:rPr sz="1600" b="0" i="0">

--- a/Pregrado/Creatividad y pensamiento innovador/Clases/Sesion 04 - Tipos de innovación/Presentacion.pptx
+++ b/Pregrado/Creatividad y pensamiento innovador/Clases/Sesion 04 - Tipos de innovación/Presentacion.pptx
@@ -8115,16 +8115,16 @@
                 </a:solidFill>
                 <a:latin typeface="Calibri"/>
               </a:rPr>
-              <a:t>Próxima sesión:</a:t>
-            </a:r>
-            <a:r>
-              <a:rPr sz="1600" b="0" i="0">
-                <a:solidFill>
-                  <a:srgbClr val="2B2B2B"/>
-                </a:solidFill>
-                <a:latin typeface="Calibri"/>
-              </a:rPr>
-              <a:t> Análisis de negocios — </a:t>
+              <a:t>(c)</a:t>
+            </a:r>
+            <a:r>
+              <a:rPr sz="1600" b="0" i="0">
+                <a:solidFill>
+                  <a:srgbClr val="2B2B2B"/>
+                </a:solidFill>
+                <a:latin typeface="Calibri"/>
+              </a:rPr>
+              <a:t> Anoten </a:t>
             </a:r>
             <a:r>
               <a:rPr sz="1600" b="1" i="0">
@@ -8133,16 +8133,120 @@
                 </a:solidFill>
                 <a:latin typeface="Calibri"/>
               </a:rPr>
-              <a:t>FODA, Business Model Canvas, MVP</a:t>
-            </a:r>
-            <a:r>
-              <a:rPr sz="1600" b="0" i="0">
-                <a:solidFill>
-                  <a:srgbClr val="2B2B2B"/>
-                </a:solidFill>
-                <a:latin typeface="Calibri"/>
-              </a:rPr>
-              <a:t> y cómo validar el supuesto más riesgoso.</a:t>
+              <a:t>una pregunta sobre el entorno</a:t>
+            </a:r>
+            <a:r>
+              <a:rPr sz="1600" b="0" i="0">
+                <a:solidFill>
+                  <a:srgbClr val="2B2B2B"/>
+                </a:solidFill>
+                <a:latin typeface="Calibri"/>
+              </a:rPr>
+              <a:t> de su propuesta: ¿ya existe algo parecido? ¿hay una norma o un permiso de por medio? La segunda mitad de la próxima sesión arranca de ahí.</a:t>
+            </a:r>
+          </a:p>
+          <a:p>
+            <a:pPr>
+              <a:spcAft>
+                <a:spcPts val="1000"/>
+              </a:spcAft>
+            </a:pPr>
+            <a:r>
+              <a:rPr sz="1600" b="0" i="0">
+                <a:solidFill>
+                  <a:srgbClr val="2B2B2B"/>
+                </a:solidFill>
+                <a:latin typeface="Calibri"/>
+              </a:rPr>
+              <a:t>–   </a:t>
+            </a:r>
+            <a:r>
+              <a:rPr sz="1600" b="1" i="0">
+                <a:solidFill>
+                  <a:srgbClr val="2B2B2B"/>
+                </a:solidFill>
+                <a:latin typeface="Calibri"/>
+              </a:rPr>
+              <a:t>Próxima sesión — es doble:</a:t>
+            </a:r>
+            <a:r>
+              <a:rPr sz="1600" b="0" i="0">
+                <a:solidFill>
+                  <a:srgbClr val="2B2B2B"/>
+                </a:solidFill>
+                <a:latin typeface="Calibri"/>
+              </a:rPr>
+              <a:t> </a:t>
+            </a:r>
+            <a:r>
+              <a:rPr sz="1600" b="1" i="0">
+                <a:solidFill>
+                  <a:srgbClr val="2B2B2B"/>
+                </a:solidFill>
+                <a:latin typeface="Calibri"/>
+              </a:rPr>
+              <a:t>FODA, Business Model Canvas y MVP</a:t>
+            </a:r>
+            <a:r>
+              <a:rPr sz="1600" b="0" i="0">
+                <a:solidFill>
+                  <a:srgbClr val="2B2B2B"/>
+                </a:solidFill>
+                <a:latin typeface="Calibri"/>
+              </a:rPr>
+              <a:t> para validar el supuesto más riesgoso, y </a:t>
+            </a:r>
+            <a:r>
+              <a:rPr sz="1600" b="1" i="0">
+                <a:solidFill>
+                  <a:srgbClr val="2B2B2B"/>
+                </a:solidFill>
+                <a:latin typeface="Calibri"/>
+              </a:rPr>
+              <a:t>vigilancia tecnológica</a:t>
+            </a:r>
+            <a:r>
+              <a:rPr sz="1600" b="0" i="0">
+                <a:solidFill>
+                  <a:srgbClr val="2B2B2B"/>
+                </a:solidFill>
+                <a:latin typeface="Calibri"/>
+              </a:rPr>
+              <a:t> para contrastar la propuesta con el entorno.</a:t>
+            </a:r>
+          </a:p>
+          <a:p>
+            <a:pPr lvl="1">
+              <a:spcAft>
+                <a:spcPts val="600"/>
+              </a:spcAft>
+            </a:pPr>
+            <a:r>
+              <a:rPr sz="1500" b="0" i="0">
+                <a:solidFill>
+                  <a:srgbClr val="2B2B2B"/>
+                </a:solidFill>
+                <a:latin typeface="Calibri"/>
+              </a:rPr>
+              <a:t>●   Se adelantó la vigilancia porque la </a:t>
+            </a:r>
+            <a:r>
+              <a:rPr sz="1500" b="1" i="0">
+                <a:solidFill>
+                  <a:srgbClr val="2B2B2B"/>
+                </a:solidFill>
+                <a:latin typeface="Calibri"/>
+              </a:rPr>
+              <a:t>ACA Final la califica</a:t>
+            </a:r>
+            <a:r>
+              <a:rPr sz="1500" b="0" i="0">
+                <a:solidFill>
+                  <a:srgbClr val="2B2B2B"/>
+                </a:solidFill>
+                <a:latin typeface="Calibri"/>
+              </a:rPr>
+              <a:t> y cierra antes de la última sesión del curso. Vengan con los supuestos escritos.</a:t>
             </a:r>
           </a:p>
         </p:txBody>

--- a/Pregrado/Creatividad y pensamiento innovador/Clases/Sesion 04 - Tipos de innovación/Presentacion.pptx
+++ b/Pregrado/Creatividad y pensamiento innovador/Clases/Sesion 04 - Tipos de innovación/Presentacion.pptx
@@ -24,6 +24,8 @@
     <p:sldId id="272" r:id="rId23"/>
     <p:sldId id="273" r:id="rId24"/>
     <p:sldId id="274" r:id="rId25"/>
+    <p:sldId id="275" r:id="rId26"/>
+    <p:sldId id="276" r:id="rId27"/>
   </p:sldIdLst>
   <p:sldSz cx="12191695" cy="6858000" type="screen4x3"/>
   <p:notesSz cx="6858000" cy="9144000"/>
@@ -6363,7 +6365,7 @@
                 </a:solidFill>
                 <a:latin typeface="Calibri"/>
               </a:rPr>
-              <a:t>TALLER — Matriz comparativa de su propuesta (21 minutos)</a:t>
+              <a:t>TALLER · Matriz comparativa de su propuesta</a:t>
             </a:r>
           </a:p>
         </p:txBody>
@@ -6376,8 +6378,8 @@
         </p:nvSpPr>
         <p:spPr>
           <a:xfrm>
-            <a:off x="640080" y="1691639"/>
-            <a:ext cx="10911535" cy="4617720"/>
+            <a:off x="640080" y="1280160"/>
+            <a:ext cx="10911535" cy="411480"/>
           </a:xfrm>
           <a:prstGeom prst="rect">
             <a:avLst/>
@@ -6390,6 +6392,59 @@
           </a:bodyPr>
           <a:lstStyle/>
           <a:p>
+            <a:pPr algn="ctr"/>
+            <a:r>
+              <a:rPr sz="1500" b="0" i="0">
+                <a:solidFill>
+                  <a:srgbClr val="2B2B2B"/>
+                </a:solidFill>
+                <a:latin typeface="Calibri"/>
+              </a:rPr>
+              <a:t>Individual · dos personas leen </a:t>
+            </a:r>
+            <a:r>
+              <a:rPr sz="1500" b="1" i="0">
+                <a:solidFill>
+                  <a:srgbClr val="2B2B2B"/>
+                </a:solidFill>
+                <a:latin typeface="Calibri"/>
+              </a:rPr>
+              <a:t>solo su conclusión</a:t>
+            </a:r>
+            <a:r>
+              <a:rPr sz="1500" b="0" i="0">
+                <a:solidFill>
+                  <a:srgbClr val="2B2B2B"/>
+                </a:solidFill>
+                <a:latin typeface="Calibri"/>
+              </a:rPr>
+              <a:t> al cerrar, no la tabla</a:t>
+            </a:r>
+          </a:p>
+        </p:txBody>
+      </p:sp>
+      <p:sp>
+        <p:nvSpPr>
+          <p:cNvPr id="5" name="TextBox 4"/>
+          <p:cNvSpPr txBox="1"/>
+          <p:nvPr/>
+        </p:nvSpPr>
+        <p:spPr>
+          <a:xfrm>
+            <a:off x="640080" y="2011679"/>
+            <a:ext cx="10911535" cy="4297680"/>
+          </a:xfrm>
+          <a:prstGeom prst="rect">
+            <a:avLst/>
+          </a:prstGeom>
+          <a:noFill/>
+        </p:spPr>
+        <p:txBody>
+          <a:bodyPr wrap="square" anchor="t" lIns="0" rIns="0" tIns="0" bIns="0">
+            <a:spAutoFit/>
+          </a:bodyPr>
+          <a:lstStyle/>
+          <a:p>
             <a:pPr>
               <a:spcAft>
                 <a:spcPts val="1000"/>
@@ -6402,7 +6457,7 @@
                 </a:solidFill>
                 <a:latin typeface="Calibri"/>
               </a:rPr>
-              <a:t>–   Armen su </a:t>
+              <a:t>–   </a:t>
             </a:r>
             <a:r>
               <a:rPr sz="1600" b="1" i="0">
@@ -6411,52 +6466,16 @@
                 </a:solidFill>
                 <a:latin typeface="Calibri"/>
               </a:rPr>
-              <a:t>matriz comparativa</a:t>
-            </a:r>
-            <a:r>
-              <a:rPr sz="1600" b="0" i="0">
-                <a:solidFill>
-                  <a:srgbClr val="2B2B2B"/>
-                </a:solidFill>
-                <a:latin typeface="Calibri"/>
-              </a:rPr>
-              <a:t>: su </a:t>
-            </a:r>
-            <a:r>
-              <a:rPr sz="1600" b="1" i="0">
-                <a:solidFill>
-                  <a:srgbClr val="2B2B2B"/>
-                </a:solidFill>
-                <a:latin typeface="Calibri"/>
-              </a:rPr>
-              <a:t>tipo elegido (A)</a:t>
-            </a:r>
-            <a:r>
-              <a:rPr sz="1600" b="0" i="0">
-                <a:solidFill>
-                  <a:srgbClr val="2B2B2B"/>
-                </a:solidFill>
-                <a:latin typeface="Calibri"/>
-              </a:rPr>
-              <a:t> contra un </a:t>
-            </a:r>
-            <a:r>
-              <a:rPr sz="1600" b="1" i="0">
-                <a:solidFill>
-                  <a:srgbClr val="2B2B2B"/>
-                </a:solidFill>
-                <a:latin typeface="Calibri"/>
-              </a:rPr>
-              <a:t>tipo alternativo que descartaron (B)</a:t>
-            </a:r>
-            <a:r>
-              <a:rPr sz="1600" b="0" i="0">
-                <a:solidFill>
-                  <a:srgbClr val="2B2B2B"/>
-                </a:solidFill>
-                <a:latin typeface="Calibri"/>
-              </a:rPr>
-              <a:t>.</a:t>
+              <a:t>Al final tiene:</a:t>
+            </a:r>
+            <a:r>
+              <a:rPr sz="1600" b="0" i="0">
+                <a:solidFill>
+                  <a:srgbClr val="2B2B2B"/>
+                </a:solidFill>
+                <a:latin typeface="Calibri"/>
+              </a:rPr>
+              <a:t> la matriz de su tipo elegido contra el que descartó, más la conclusión de 4 líneas.</a:t>
             </a:r>
           </a:p>
           <a:p>
@@ -6481,16 +6500,16 @@
                 </a:solidFill>
                 <a:latin typeface="Calibri"/>
               </a:rPr>
-              <a:t>Minutos 0–3</a:t>
-            </a:r>
-            <a:r>
-              <a:rPr sz="1600" b="0" i="0">
-                <a:solidFill>
-                  <a:srgbClr val="2B2B2B"/>
-                </a:solidFill>
-                <a:latin typeface="Calibri"/>
-              </a:rPr>
-              <a:t> · Nombren A y B, y declaren el </a:t>
+              <a:t>Paso 1</a:t>
+            </a:r>
+            <a:r>
+              <a:rPr sz="1600" b="0" i="0">
+                <a:solidFill>
+                  <a:srgbClr val="2B2B2B"/>
+                </a:solidFill>
+                <a:latin typeface="Calibri"/>
+              </a:rPr>
+              <a:t> · Nombre </a:t>
             </a:r>
             <a:r>
               <a:rPr sz="1600" b="1" i="0">
@@ -6499,6 +6518,42 @@
                 </a:solidFill>
                 <a:latin typeface="Calibri"/>
               </a:rPr>
+              <a:t>A</a:t>
+            </a:r>
+            <a:r>
+              <a:rPr sz="1600" b="0" i="0">
+                <a:solidFill>
+                  <a:srgbClr val="2B2B2B"/>
+                </a:solidFill>
+                <a:latin typeface="Calibri"/>
+              </a:rPr>
+              <a:t> (su tipo elegido) y </a:t>
+            </a:r>
+            <a:r>
+              <a:rPr sz="1600" b="1" i="0">
+                <a:solidFill>
+                  <a:srgbClr val="2B2B2B"/>
+                </a:solidFill>
+                <a:latin typeface="Calibri"/>
+              </a:rPr>
+              <a:t>B</a:t>
+            </a:r>
+            <a:r>
+              <a:rPr sz="1600" b="0" i="0">
+                <a:solidFill>
+                  <a:srgbClr val="2B2B2B"/>
+                </a:solidFill>
+                <a:latin typeface="Calibri"/>
+              </a:rPr>
+              <a:t> (el tipo alternativo que descartó), y declare el </a:t>
+            </a:r>
+            <a:r>
+              <a:rPr sz="1600" b="1" i="0">
+                <a:solidFill>
+                  <a:srgbClr val="2B2B2B"/>
+                </a:solidFill>
+                <a:latin typeface="Calibri"/>
+              </a:rPr>
               <a:t>grado</a:t>
             </a:r>
             <a:r>
@@ -6508,7 +6563,7 @@
                 </a:solidFill>
                 <a:latin typeface="Calibri"/>
               </a:rPr>
-              <a:t> (incremental / radical) con una razón.</a:t>
+              <a:t> —incremental o radical— con una razón.</a:t>
             </a:r>
           </a:p>
           <a:p>
@@ -6533,16 +6588,16 @@
                 </a:solidFill>
                 <a:latin typeface="Calibri"/>
               </a:rPr>
-              <a:t>Minutos 3–8</a:t>
-            </a:r>
-            <a:r>
-              <a:rPr sz="1600" b="0" i="0">
-                <a:solidFill>
-                  <a:srgbClr val="2B2B2B"/>
-                </a:solidFill>
-                <a:latin typeface="Calibri"/>
-              </a:rPr>
-              <a:t> · Escriban </a:t>
+              <a:t>Paso 2</a:t>
+            </a:r>
+            <a:r>
+              <a:rPr sz="1600" b="0" i="0">
+                <a:solidFill>
+                  <a:srgbClr val="2B2B2B"/>
+                </a:solidFill>
+                <a:latin typeface="Calibri"/>
+              </a:rPr>
+              <a:t> · Escriba </a:t>
             </a:r>
             <a:r>
               <a:rPr sz="1600" b="1" i="0">
@@ -6560,7 +6615,7 @@
                 </a:solidFill>
                 <a:latin typeface="Calibri"/>
               </a:rPr>
-              <a:t> en las filas. Uno de ellos debe tocar el </a:t>
+              <a:t> en las filas. Uno tiene que tocar el </a:t>
             </a:r>
             <a:r>
               <a:rPr sz="1600" b="1" i="0">
@@ -6578,7 +6633,7 @@
                 </a:solidFill>
                 <a:latin typeface="Calibri"/>
               </a:rPr>
-              <a:t> (quién paga / quién usa / restricción).</a:t>
+              <a:t>: quién paga, quién usa, qué restringe.</a:t>
             </a:r>
           </a:p>
           <a:p>
@@ -6603,16 +6658,16 @@
                 </a:solidFill>
                 <a:latin typeface="Calibri"/>
               </a:rPr>
-              <a:t>Minutos 8–15</a:t>
-            </a:r>
-            <a:r>
-              <a:rPr sz="1600" b="0" i="0">
-                <a:solidFill>
-                  <a:srgbClr val="2B2B2B"/>
-                </a:solidFill>
-                <a:latin typeface="Calibri"/>
-              </a:rPr>
-              <a:t> · Puntúen </a:t>
+              <a:t>Paso 3</a:t>
+            </a:r>
+            <a:r>
+              <a:rPr sz="1600" b="0" i="0">
+                <a:solidFill>
+                  <a:srgbClr val="2B2B2B"/>
+                </a:solidFill>
+                <a:latin typeface="Calibri"/>
+              </a:rPr>
+              <a:t> · Puntúe </a:t>
             </a:r>
             <a:r>
               <a:rPr sz="1600" b="1" i="0">
@@ -6630,7 +6685,7 @@
                 </a:solidFill>
                 <a:latin typeface="Calibri"/>
               </a:rPr>
-              <a:t> para </a:t>
+              <a:t> en </a:t>
             </a:r>
             <a:r>
               <a:rPr sz="1600" b="1" i="0">
@@ -6639,7 +6694,7 @@
                 </a:solidFill>
                 <a:latin typeface="Calibri"/>
               </a:rPr>
-              <a:t>ambas</a:t>
+              <a:t>las dos</a:t>
             </a:r>
             <a:r>
               <a:rPr sz="1600" b="0" i="0">
@@ -6673,16 +6728,16 @@
                 </a:solidFill>
                 <a:latin typeface="Calibri"/>
               </a:rPr>
-              <a:t>Minutos 15–21</a:t>
-            </a:r>
-            <a:r>
-              <a:rPr sz="1600" b="0" i="0">
-                <a:solidFill>
-                  <a:srgbClr val="2B2B2B"/>
-                </a:solidFill>
-                <a:latin typeface="Calibri"/>
-              </a:rPr>
-              <a:t> · Escriban la </a:t>
+              <a:t>Paso 4</a:t>
+            </a:r>
+            <a:r>
+              <a:rPr sz="1600" b="0" i="0">
+                <a:solidFill>
+                  <a:srgbClr val="2B2B2B"/>
+                </a:solidFill>
+                <a:latin typeface="Calibri"/>
+              </a:rPr>
+              <a:t> · Escriba la </a:t>
             </a:r>
             <a:r>
               <a:rPr sz="1600" b="1" i="0">
@@ -6700,7 +6755,7 @@
                 </a:solidFill>
                 <a:latin typeface="Calibri"/>
               </a:rPr>
-              <a:t> siguiendo la estructura: elijo / empatan en / gana en / descarto porque.</a:t>
+              <a:t> con la estructura: elijo / empatan en / gana en / descarto porque.</a:t>
             </a:r>
           </a:p>
           <a:p>
@@ -6716,7 +6771,7 @@
                 </a:solidFill>
                 <a:latin typeface="Calibri"/>
               </a:rPr>
-              <a:t>–   Al final, </a:t>
+              <a:t>–   </a:t>
             </a:r>
             <a:r>
               <a:rPr sz="1600" b="1" i="0">
@@ -6725,16 +6780,16 @@
                 </a:solidFill>
                 <a:latin typeface="Calibri"/>
               </a:rPr>
-              <a:t>dos personas</a:t>
-            </a:r>
-            <a:r>
-              <a:rPr sz="1600" b="0" i="0">
-                <a:solidFill>
-                  <a:srgbClr val="2B2B2B"/>
-                </a:solidFill>
-                <a:latin typeface="Calibri"/>
-              </a:rPr>
-              <a:t> leen </a:t>
+              <a:t>En clase, sin falta:</a:t>
+            </a:r>
+            <a:r>
+              <a:rPr sz="1600" b="0" i="0">
+                <a:solidFill>
+                  <a:srgbClr val="2B2B2B"/>
+                </a:solidFill>
+                <a:latin typeface="Calibri"/>
+              </a:rPr>
+              <a:t> los </a:t>
             </a:r>
             <a:r>
               <a:rPr sz="1600" b="1" i="0">
@@ -6743,91 +6798,23 @@
                 </a:solidFill>
                 <a:latin typeface="Calibri"/>
               </a:rPr>
-              <a:t>solo su conclusión</a:t>
-            </a:r>
-            <a:r>
-              <a:rPr sz="1600" b="0" i="0">
-                <a:solidFill>
-                  <a:srgbClr val="2B2B2B"/>
-                </a:solidFill>
-                <a:latin typeface="Calibri"/>
-              </a:rPr>
-              <a:t> — no la tabla completa.</a:t>
-            </a:r>
-          </a:p>
-          <a:p>
-            <a:pPr>
-              <a:spcAft>
-                <a:spcPts val="1000"/>
-              </a:spcAft>
-            </a:pPr>
-            <a:r>
-              <a:rPr sz="1600" b="0" i="0">
-                <a:solidFill>
-                  <a:srgbClr val="2B2B2B"/>
-                </a:solidFill>
-                <a:latin typeface="Calibri"/>
-              </a:rPr>
-              <a:t>–   </a:t>
-            </a:r>
-            <a:r>
-              <a:rPr sz="1600" b="1" i="0">
-                <a:solidFill>
-                  <a:srgbClr val="2B2B2B"/>
-                </a:solidFill>
-                <a:latin typeface="Calibri"/>
-              </a:rPr>
-              <a:t>Criterio de éxito verificable:</a:t>
-            </a:r>
-            <a:r>
-              <a:rPr sz="1600" b="0" i="0">
-                <a:solidFill>
-                  <a:srgbClr val="2B2B2B"/>
-                </a:solidFill>
-                <a:latin typeface="Calibri"/>
-              </a:rPr>
-              <a:t> la conclusión </a:t>
-            </a:r>
-            <a:r>
-              <a:rPr sz="1600" b="1" i="0">
-                <a:solidFill>
-                  <a:srgbClr val="2B2B2B"/>
-                </a:solidFill>
-                <a:latin typeface="Calibri"/>
-              </a:rPr>
-              <a:t>cita al menos dos criterios de la tabla por su nombre</a:t>
-            </a:r>
-            <a:r>
-              <a:rPr sz="1600" b="0" i="0">
-                <a:solidFill>
-                  <a:srgbClr val="2B2B2B"/>
-                </a:solidFill>
-                <a:latin typeface="Calibri"/>
-              </a:rPr>
-              <a:t> y no contiene la frase "me gusta más" ni equivalentes.</a:t>
-            </a:r>
-          </a:p>
-          <a:p>
-            <a:pPr lvl="1">
-              <a:spcAft>
-                <a:spcPts val="600"/>
-              </a:spcAft>
-            </a:pPr>
-            <a:r>
-              <a:rPr sz="1500" b="0" i="0">
-                <a:solidFill>
-                  <a:srgbClr val="2B2B2B"/>
-                </a:solidFill>
-                <a:latin typeface="Calibri"/>
-              </a:rPr>
-              <a:t>●   Segunda verificación: si tapo la conclusión, ¿alguien más llegaría a la misma decisión leyendo solo la tabla? Si sí, está bien hecha.</a:t>
-            </a:r>
-          </a:p>
-        </p:txBody>
-      </p:sp>
-      <p:sp>
-        <p:nvSpPr>
-          <p:cNvPr id="5" name="TextBox 4"/>
+              <a:t>pasos 1 a 3</a:t>
+            </a:r>
+            <a:r>
+              <a:rPr sz="1600" b="0" i="0">
+                <a:solidFill>
+                  <a:srgbClr val="2B2B2B"/>
+                </a:solidFill>
+                <a:latin typeface="Calibri"/>
+              </a:rPr>
+              <a:t>. Del 4 en adelante puede quedar en trabajo autónomo, pero antes de la próxima sesión.</a:t>
+            </a:r>
+          </a:p>
+        </p:txBody>
+      </p:sp>
+      <p:sp>
+        <p:nvSpPr>
+          <p:cNvPr id="6" name="TextBox 5"/>
           <p:cNvSpPr txBox="1"/>
           <p:nvPr/>
         </p:nvSpPr>
@@ -6960,7 +6947,7 @@
                 </a:solidFill>
                 <a:latin typeface="Calibri"/>
               </a:rPr>
-              <a:t>Antes de entregar: revise usted mismo</a:t>
+              <a:t>TALLER · cómo se revisa y dónde se entrega</a:t>
             </a:r>
           </a:p>
         </p:txBody>
@@ -6973,8 +6960,8 @@
         </p:nvSpPr>
         <p:spPr>
           <a:xfrm>
-            <a:off x="640080" y="1691639"/>
-            <a:ext cx="10911535" cy="4617720"/>
+            <a:off x="640080" y="1280160"/>
+            <a:ext cx="10911535" cy="411480"/>
           </a:xfrm>
           <a:prstGeom prst="rect">
             <a:avLst/>
@@ -6987,6 +6974,41 @@
           </a:bodyPr>
           <a:lstStyle/>
           <a:p>
+            <a:pPr algn="ctr"/>
+            <a:r>
+              <a:rPr sz="1500" b="0" i="0">
+                <a:solidFill>
+                  <a:srgbClr val="2B2B2B"/>
+                </a:solidFill>
+                <a:latin typeface="Calibri"/>
+              </a:rPr>
+              <a:t>Matriz comparativa de su propuesta</a:t>
+            </a:r>
+          </a:p>
+        </p:txBody>
+      </p:sp>
+      <p:sp>
+        <p:nvSpPr>
+          <p:cNvPr id="5" name="TextBox 4"/>
+          <p:cNvSpPr txBox="1"/>
+          <p:nvPr/>
+        </p:nvSpPr>
+        <p:spPr>
+          <a:xfrm>
+            <a:off x="640080" y="2011679"/>
+            <a:ext cx="10911535" cy="4297680"/>
+          </a:xfrm>
+          <a:prstGeom prst="rect">
+            <a:avLst/>
+          </a:prstGeom>
+          <a:noFill/>
+        </p:spPr>
+        <p:txBody>
+          <a:bodyPr wrap="square" anchor="t" lIns="0" rIns="0" tIns="0" bIns="0">
+            <a:spAutoFit/>
+          </a:bodyPr>
+          <a:lstStyle/>
+          <a:p>
             <a:pPr>
               <a:spcAft>
                 <a:spcPts val="1000"/>
@@ -6999,7 +7021,7 @@
                 </a:solidFill>
                 <a:latin typeface="Calibri"/>
               </a:rPr>
-              <a:t>–   ☐ Mi matriz tiene </a:t>
+              <a:t>–   </a:t>
             </a:r>
             <a:r>
               <a:rPr sz="1600" b="1" i="0">
@@ -7008,34 +7030,100 @@
                 </a:solidFill>
                 <a:latin typeface="Calibri"/>
               </a:rPr>
-              <a:t>5 criterios o más</a:t>
-            </a:r>
-            <a:r>
-              <a:rPr sz="1600" b="0" i="0">
-                <a:solidFill>
-                  <a:srgbClr val="2B2B2B"/>
-                </a:solidFill>
-                <a:latin typeface="Calibri"/>
-              </a:rPr>
-              <a:t>, escritos </a:t>
-            </a:r>
-            <a:r>
-              <a:rPr sz="1600" b="1" i="0">
-                <a:solidFill>
-                  <a:srgbClr val="2B2B2B"/>
-                </a:solidFill>
-                <a:latin typeface="Calibri"/>
-              </a:rPr>
-              <a:t>antes</a:t>
-            </a:r>
-            <a:r>
-              <a:rPr sz="1600" b="0" i="0">
-                <a:solidFill>
-                  <a:srgbClr val="2B2B2B"/>
-                </a:solidFill>
-                <a:latin typeface="Calibri"/>
-              </a:rPr>
-              <a:t> de puntuar.</a:t>
+              <a:t>Quedó bien si</a:t>
+            </a:r>
+            <a:r>
+              <a:rPr sz="1600" b="0" i="0">
+                <a:solidFill>
+                  <a:srgbClr val="2B2B2B"/>
+                </a:solidFill>
+                <a:latin typeface="Calibri"/>
+              </a:rPr>
+              <a:t> —compruébelo usted antes de cerrar el documento—:</a:t>
+            </a:r>
+          </a:p>
+          <a:p>
+            <a:pPr lvl="1">
+              <a:spcAft>
+                <a:spcPts val="600"/>
+              </a:spcAft>
+            </a:pPr>
+            <a:r>
+              <a:rPr sz="1500" b="0" i="0">
+                <a:solidFill>
+                  <a:srgbClr val="2B2B2B"/>
+                </a:solidFill>
+                <a:latin typeface="Calibri"/>
+              </a:rPr>
+              <a:t>●   La conclusión </a:t>
+            </a:r>
+            <a:r>
+              <a:rPr sz="1500" b="1" i="0">
+                <a:solidFill>
+                  <a:srgbClr val="2B2B2B"/>
+                </a:solidFill>
+                <a:latin typeface="Calibri"/>
+              </a:rPr>
+              <a:t>cita por su nombre al menos dos criterios</a:t>
+            </a:r>
+            <a:r>
+              <a:rPr sz="1500" b="0" i="0">
+                <a:solidFill>
+                  <a:srgbClr val="2B2B2B"/>
+                </a:solidFill>
+                <a:latin typeface="Calibri"/>
+              </a:rPr>
+              <a:t> de la tabla.</a:t>
+            </a:r>
+          </a:p>
+          <a:p>
+            <a:pPr lvl="1">
+              <a:spcAft>
+                <a:spcPts val="600"/>
+              </a:spcAft>
+            </a:pPr>
+            <a:r>
+              <a:rPr sz="1500" b="0" i="0">
+                <a:solidFill>
+                  <a:srgbClr val="2B2B2B"/>
+                </a:solidFill>
+                <a:latin typeface="Calibri"/>
+              </a:rPr>
+              <a:t>●   No aparece «me gusta más» ni ningún equivalente.</a:t>
+            </a:r>
+          </a:p>
+          <a:p>
+            <a:pPr lvl="1">
+              <a:spcAft>
+                <a:spcPts val="600"/>
+              </a:spcAft>
+            </a:pPr>
+            <a:r>
+              <a:rPr sz="1500" b="0" i="0">
+                <a:solidFill>
+                  <a:srgbClr val="2B2B2B"/>
+                </a:solidFill>
+                <a:latin typeface="Calibri"/>
+              </a:rPr>
+              <a:t>●   Si se tapa la conclusión, otra persona llega a la </a:t>
+            </a:r>
+            <a:r>
+              <a:rPr sz="1500" b="1" i="0">
+                <a:solidFill>
+                  <a:srgbClr val="2B2B2B"/>
+                </a:solidFill>
+                <a:latin typeface="Calibri"/>
+              </a:rPr>
+              <a:t>misma decisión</a:t>
+            </a:r>
+            <a:r>
+              <a:rPr sz="1500" b="0" i="0">
+                <a:solidFill>
+                  <a:srgbClr val="2B2B2B"/>
+                </a:solidFill>
+                <a:latin typeface="Calibri"/>
+              </a:rPr>
+              <a:t> leyendo solo la tabla.</a:t>
             </a:r>
           </a:p>
           <a:p>
@@ -7051,7 +7139,7 @@
                 </a:solidFill>
                 <a:latin typeface="Calibri"/>
               </a:rPr>
-              <a:t>–   ☐ Puntué </a:t>
+              <a:t>–   </a:t>
             </a:r>
             <a:r>
               <a:rPr sz="1600" b="1" i="0">
@@ -7060,34 +7148,16 @@
                 </a:solidFill>
                 <a:latin typeface="Calibri"/>
               </a:rPr>
-              <a:t>las dos columnas</a:t>
-            </a:r>
-            <a:r>
-              <a:rPr sz="1600" b="0" i="0">
-                <a:solidFill>
-                  <a:srgbClr val="2B2B2B"/>
-                </a:solidFill>
-                <a:latin typeface="Calibri"/>
-              </a:rPr>
-              <a:t> en </a:t>
-            </a:r>
-            <a:r>
-              <a:rPr sz="1600" b="1" i="0">
-                <a:solidFill>
-                  <a:srgbClr val="2B2B2B"/>
-                </a:solidFill>
-                <a:latin typeface="Calibri"/>
-              </a:rPr>
-              <a:t>todas</a:t>
-            </a:r>
-            <a:r>
-              <a:rPr sz="1600" b="0" i="0">
-                <a:solidFill>
-                  <a:srgbClr val="2B2B2B"/>
-                </a:solidFill>
-                <a:latin typeface="Calibri"/>
-              </a:rPr>
-              <a:t> las filas — no dejé casillas vacías en la opción descartada.</a:t>
+              <a:t>Plan B:</a:t>
+            </a:r>
+            <a:r>
+              <a:rPr sz="1600" b="0" i="0">
+                <a:solidFill>
+                  <a:srgbClr val="2B2B2B"/>
+                </a:solidFill>
+                <a:latin typeface="Calibri"/>
+              </a:rPr>
+              <a:t> Si no le salen 5 criterios, saque tres de su propia HMW —usuario, dolor, resultado— y dos del contexto: quién paga y qué restricción hay.</a:t>
             </a:r>
           </a:p>
           <a:p>
@@ -7103,7 +7173,7 @@
                 </a:solidFill>
                 <a:latin typeface="Calibri"/>
               </a:rPr>
-              <a:t>–   ☐ </a:t>
+              <a:t>–   </a:t>
             </a:r>
             <a:r>
               <a:rPr sz="1600" b="1" i="0">
@@ -7112,16 +7182,16 @@
                 </a:solidFill>
                 <a:latin typeface="Calibri"/>
               </a:rPr>
-              <a:t>No todas</a:t>
-            </a:r>
-            <a:r>
-              <a:rPr sz="1600" b="0" i="0">
-                <a:solidFill>
-                  <a:srgbClr val="2B2B2B"/>
-                </a:solidFill>
-                <a:latin typeface="Calibri"/>
-              </a:rPr>
-              <a:t> mis filas dan el mismo resultado: la matriz </a:t>
+              <a:t>Hoy no se sube nada al aula:</a:t>
+            </a:r>
+            <a:r>
+              <a:rPr sz="1600" b="0" i="0">
+                <a:solidFill>
+                  <a:srgbClr val="2B2B2B"/>
+                </a:solidFill>
+                <a:latin typeface="Calibri"/>
+              </a:rPr>
+              <a:t> guarde `S04_MatrizTipos_Apellido` (Google Doc o PDF) en su Drive y tráigalo a la próxima sesión. Es un </a:t>
             </a:r>
             <a:r>
               <a:rPr sz="1600" b="1" i="0">
@@ -7130,16 +7200,16 @@
                 </a:solidFill>
                 <a:latin typeface="Calibri"/>
               </a:rPr>
-              <a:t>sí discrimina</a:t>
-            </a:r>
-            <a:r>
-              <a:rPr sz="1600" b="0" i="0">
-                <a:solidFill>
-                  <a:srgbClr val="2B2B2B"/>
-                </a:solidFill>
-                <a:latin typeface="Calibri"/>
-              </a:rPr>
-              <a:t>.</a:t>
+              <a:t>avance formativo</a:t>
+            </a:r>
+            <a:r>
+              <a:rPr sz="1600" b="0" i="0">
+                <a:solidFill>
+                  <a:srgbClr val="2B2B2B"/>
+                </a:solidFill>
+                <a:latin typeface="Calibri"/>
+              </a:rPr>
+              <a:t>, se revisa en clase.</a:t>
             </a:r>
           </a:p>
           <a:p>
@@ -7155,7 +7225,7 @@
                 </a:solidFill>
                 <a:latin typeface="Calibri"/>
               </a:rPr>
-              <a:t>–   ☐ Al menos un criterio toca el contexto: </a:t>
+              <a:t>–   </a:t>
             </a:r>
             <a:r>
               <a:rPr sz="1600" b="1" i="0">
@@ -7164,7 +7234,79 @@
                 </a:solidFill>
                 <a:latin typeface="Calibri"/>
               </a:rPr>
-              <a:t>quién paga, quién usa o qué restricción hay</a:t>
+              <a:t>Esto alimenta:</a:t>
+            </a:r>
+            <a:r>
+              <a:rPr sz="1600" b="0" i="0">
+                <a:solidFill>
+                  <a:srgbClr val="2B2B2B"/>
+                </a:solidFill>
+                <a:latin typeface="Calibri"/>
+              </a:rPr>
+              <a:t> </a:t>
+            </a:r>
+            <a:r>
+              <a:rPr sz="1600" b="1" i="0">
+                <a:solidFill>
+                  <a:srgbClr val="2B2B2B"/>
+                </a:solidFill>
+                <a:latin typeface="Calibri"/>
+              </a:rPr>
+              <a:t>ACA Final</a:t>
+            </a:r>
+            <a:r>
+              <a:rPr sz="1600" b="0" i="0">
+                <a:solidFill>
+                  <a:srgbClr val="2B2B2B"/>
+                </a:solidFill>
+                <a:latin typeface="Calibri"/>
+              </a:rPr>
+              <a:t> —tarea, 32,8%—, el documento que </a:t>
+            </a:r>
+            <a:r>
+              <a:rPr sz="1600" b="1" i="0">
+                <a:solidFill>
+                  <a:srgbClr val="2B2B2B"/>
+                </a:solidFill>
+                <a:latin typeface="Calibri"/>
+              </a:rPr>
+              <a:t>sí</a:t>
+            </a:r>
+            <a:r>
+              <a:rPr sz="1600" b="0" i="0">
+                <a:solidFill>
+                  <a:srgbClr val="2B2B2B"/>
+                </a:solidFill>
+                <a:latin typeface="Calibri"/>
+              </a:rPr>
+              <a:t> recibe </a:t>
+            </a:r>
+            <a:r>
+              <a:rPr sz="1600" b="1" i="0">
+                <a:solidFill>
+                  <a:srgbClr val="2B2B2B"/>
+                </a:solidFill>
+                <a:latin typeface="Calibri"/>
+              </a:rPr>
+              <a:t>CDigital</a:t>
+            </a:r>
+            <a:r>
+              <a:rPr sz="1600" b="0" i="0">
+                <a:solidFill>
+                  <a:srgbClr val="2B2B2B"/>
+                </a:solidFill>
+                <a:latin typeface="Calibri"/>
+              </a:rPr>
+              <a:t>; cierra en la semana de la </a:t>
+            </a:r>
+            <a:r>
+              <a:rPr sz="1600" b="1" i="0">
+                <a:solidFill>
+                  <a:srgbClr val="2B2B2B"/>
+                </a:solidFill>
+                <a:latin typeface="Calibri"/>
+              </a:rPr>
+              <a:t>Sesión 06</a:t>
             </a:r>
             <a:r>
               <a:rPr sz="1600" b="0" i="0">
@@ -7176,217 +7318,11 @@
               <a:t>.</a:t>
             </a:r>
           </a:p>
-          <a:p>
-            <a:pPr>
-              <a:spcAft>
-                <a:spcPts val="1000"/>
-              </a:spcAft>
-            </a:pPr>
-            <a:r>
-              <a:rPr sz="1600" b="0" i="0">
-                <a:solidFill>
-                  <a:srgbClr val="2B2B2B"/>
-                </a:solidFill>
-                <a:latin typeface="Calibri"/>
-              </a:rPr>
-              <a:t>–   ☐ Declaré el </a:t>
-            </a:r>
-            <a:r>
-              <a:rPr sz="1600" b="1" i="0">
-                <a:solidFill>
-                  <a:srgbClr val="2B2B2B"/>
-                </a:solidFill>
-                <a:latin typeface="Calibri"/>
-              </a:rPr>
-              <a:t>grado</a:t>
-            </a:r>
-            <a:r>
-              <a:rPr sz="1600" b="0" i="0">
-                <a:solidFill>
-                  <a:srgbClr val="2B2B2B"/>
-                </a:solidFill>
-                <a:latin typeface="Calibri"/>
-              </a:rPr>
-              <a:t> (incremental / radical) y puedo decir </a:t>
-            </a:r>
-            <a:r>
-              <a:rPr sz="1600" b="1" i="0">
-                <a:solidFill>
-                  <a:srgbClr val="2B2B2B"/>
-                </a:solidFill>
-                <a:latin typeface="Calibri"/>
-              </a:rPr>
-              <a:t>con qué evidencia</a:t>
-            </a:r>
-            <a:r>
-              <a:rPr sz="1600" b="0" i="0">
-                <a:solidFill>
-                  <a:srgbClr val="2B2B2B"/>
-                </a:solidFill>
-                <a:latin typeface="Calibri"/>
-              </a:rPr>
-              <a:t> lo sostengo.</a:t>
-            </a:r>
-          </a:p>
-          <a:p>
-            <a:pPr>
-              <a:spcAft>
-                <a:spcPts val="1000"/>
-              </a:spcAft>
-            </a:pPr>
-            <a:r>
-              <a:rPr sz="1600" b="0" i="0">
-                <a:solidFill>
-                  <a:srgbClr val="2B2B2B"/>
-                </a:solidFill>
-                <a:latin typeface="Calibri"/>
-              </a:rPr>
-              <a:t>–   ☐ Mi conclusión menciona </a:t>
-            </a:r>
-            <a:r>
-              <a:rPr sz="1600" b="1" i="0">
-                <a:solidFill>
-                  <a:srgbClr val="2B2B2B"/>
-                </a:solidFill>
-                <a:latin typeface="Calibri"/>
-              </a:rPr>
-              <a:t>criterios por su nombre</a:t>
-            </a:r>
-            <a:r>
-              <a:rPr sz="1600" b="0" i="0">
-                <a:solidFill>
-                  <a:srgbClr val="2B2B2B"/>
-                </a:solidFill>
-                <a:latin typeface="Calibri"/>
-              </a:rPr>
-              <a:t>, no adjetivos.</a:t>
-            </a:r>
-          </a:p>
-          <a:p>
-            <a:pPr>
-              <a:spcAft>
-                <a:spcPts val="1000"/>
-              </a:spcAft>
-            </a:pPr>
-            <a:r>
-              <a:rPr sz="1600" b="0" i="0">
-                <a:solidFill>
-                  <a:srgbClr val="2B2B2B"/>
-                </a:solidFill>
-                <a:latin typeface="Calibri"/>
-              </a:rPr>
-              <a:t>–   ☐ Mi conclusión explica </a:t>
-            </a:r>
-            <a:r>
-              <a:rPr sz="1600" b="1" i="0">
-                <a:solidFill>
-                  <a:srgbClr val="2B2B2B"/>
-                </a:solidFill>
-                <a:latin typeface="Calibri"/>
-              </a:rPr>
-              <a:t>por qué descarto B</a:t>
-            </a:r>
-            <a:r>
-              <a:rPr sz="1600" b="0" i="0">
-                <a:solidFill>
-                  <a:srgbClr val="2B2B2B"/>
-                </a:solidFill>
-                <a:latin typeface="Calibri"/>
-              </a:rPr>
-              <a:t> sin descalificarlo.</a:t>
-            </a:r>
-          </a:p>
-          <a:p>
-            <a:pPr>
-              <a:spcAft>
-                <a:spcPts val="1000"/>
-              </a:spcAft>
-            </a:pPr>
-            <a:r>
-              <a:rPr sz="1600" b="0" i="0">
-                <a:solidFill>
-                  <a:srgbClr val="2B2B2B"/>
-                </a:solidFill>
-                <a:latin typeface="Calibri"/>
-              </a:rPr>
-              <a:t>–   ☐ El archivo se llama </a:t>
-            </a:r>
-            <a:r>
-              <a:rPr sz="1600" b="1" i="0">
-                <a:solidFill>
-                  <a:srgbClr val="2B2B2B"/>
-                </a:solidFill>
-                <a:latin typeface="Calibri"/>
-              </a:rPr>
-              <a:t>`S04_MatrizTipos_Apellido`</a:t>
-            </a:r>
-            <a:r>
-              <a:rPr sz="1600" b="0" i="0">
-                <a:solidFill>
-                  <a:srgbClr val="2B2B2B"/>
-                </a:solidFill>
-                <a:latin typeface="Calibri"/>
-              </a:rPr>
-              <a:t> y está en </a:t>
-            </a:r>
-            <a:r>
-              <a:rPr sz="1600" b="1" i="0">
-                <a:solidFill>
-                  <a:srgbClr val="2B2B2B"/>
-                </a:solidFill>
-                <a:latin typeface="Calibri"/>
-              </a:rPr>
-              <a:t>CDigital</a:t>
-            </a:r>
-            <a:r>
-              <a:rPr sz="1600" b="0" i="0">
-                <a:solidFill>
-                  <a:srgbClr val="2B2B2B"/>
-                </a:solidFill>
-                <a:latin typeface="Calibri"/>
-              </a:rPr>
-              <a:t>.</a:t>
-            </a:r>
-          </a:p>
-          <a:p>
-            <a:pPr>
-              <a:spcAft>
-                <a:spcPts val="1000"/>
-              </a:spcAft>
-            </a:pPr>
-            <a:r>
-              <a:rPr sz="1600" b="0" i="0">
-                <a:solidFill>
-                  <a:srgbClr val="2B2B2B"/>
-                </a:solidFill>
-                <a:latin typeface="Calibri"/>
-              </a:rPr>
-              <a:t>–   Prueba de honestidad: si al llenar la matriz </a:t>
-            </a:r>
-            <a:r>
-              <a:rPr sz="1600" b="1" i="0">
-                <a:solidFill>
-                  <a:srgbClr val="2B2B2B"/>
-                </a:solidFill>
-                <a:latin typeface="Calibri"/>
-              </a:rPr>
-              <a:t>ganó la opción B</a:t>
-            </a:r>
-            <a:r>
-              <a:rPr sz="1600" b="0" i="0">
-                <a:solidFill>
-                  <a:srgbClr val="2B2B2B"/>
-                </a:solidFill>
-                <a:latin typeface="Calibri"/>
-              </a:rPr>
-              <a:t>, cámbiese a B. Eso no es perder: es que el método funcionó.</a:t>
-            </a:r>
-          </a:p>
-        </p:txBody>
-      </p:sp>
-      <p:sp>
-        <p:nvSpPr>
-          <p:cNvPr id="5" name="TextBox 4"/>
+        </p:txBody>
+      </p:sp>
+      <p:sp>
+        <p:nvSpPr>
+          <p:cNvPr id="6" name="TextBox 5"/>
           <p:cNvSpPr txBox="1"/>
           <p:nvPr/>
         </p:nvSpPr>
@@ -7519,7 +7455,7 @@
                 </a:solidFill>
                 <a:latin typeface="Calibri"/>
               </a:rPr>
-              <a:t>Para continuar — trabajo autónomo</a:t>
+              <a:t>Antes de entregar: revise usted mismo</a:t>
             </a:r>
           </a:p>
         </p:txBody>
@@ -7558,7 +7494,7 @@
                 </a:solidFill>
                 <a:latin typeface="Calibri"/>
               </a:rPr>
-              <a:t>–   </a:t>
+              <a:t>–   ☐ Mi matriz tiene </a:t>
             </a:r>
             <a:r>
               <a:rPr sz="1600" b="1" i="0">
@@ -7567,127 +7503,34 @@
                 </a:solidFill>
                 <a:latin typeface="Calibri"/>
               </a:rPr>
-              <a:t>Tres ideas para llevarse de hoy:</a:t>
-            </a:r>
-          </a:p>
-          <a:p>
-            <a:pPr lvl="1">
-              <a:spcAft>
-                <a:spcPts val="600"/>
-              </a:spcAft>
-            </a:pPr>
-            <a:r>
-              <a:rPr sz="1500" b="0" i="0">
-                <a:solidFill>
-                  <a:srgbClr val="2B2B2B"/>
-                </a:solidFill>
-                <a:latin typeface="Calibri"/>
-              </a:rPr>
-              <a:t>●   1. El </a:t>
-            </a:r>
-            <a:r>
-              <a:rPr sz="1500" b="1" i="0">
-                <a:solidFill>
-                  <a:srgbClr val="2B2B2B"/>
-                </a:solidFill>
-                <a:latin typeface="Calibri"/>
-              </a:rPr>
-              <a:t>tipo</a:t>
-            </a:r>
-            <a:r>
-              <a:rPr sz="1500" b="0" i="0">
-                <a:solidFill>
-                  <a:srgbClr val="2B2B2B"/>
-                </a:solidFill>
-                <a:latin typeface="Calibri"/>
-              </a:rPr>
-              <a:t> dice qué cambia; el </a:t>
-            </a:r>
-            <a:r>
-              <a:rPr sz="1500" b="1" i="0">
-                <a:solidFill>
-                  <a:srgbClr val="2B2B2B"/>
-                </a:solidFill>
-                <a:latin typeface="Calibri"/>
-              </a:rPr>
-              <a:t>grado</a:t>
-            </a:r>
-            <a:r>
-              <a:rPr sz="1500" b="0" i="0">
-                <a:solidFill>
-                  <a:srgbClr val="2B2B2B"/>
-                </a:solidFill>
-                <a:latin typeface="Calibri"/>
-              </a:rPr>
-              <a:t> dice cuánto rompe. Son dimensiones distintas.</a:t>
-            </a:r>
-          </a:p>
-          <a:p>
-            <a:pPr lvl="1">
-              <a:spcAft>
-                <a:spcPts val="600"/>
-              </a:spcAft>
-            </a:pPr>
-            <a:r>
-              <a:rPr sz="1500" b="0" i="0">
-                <a:solidFill>
-                  <a:srgbClr val="2B2B2B"/>
-                </a:solidFill>
-                <a:latin typeface="Calibri"/>
-              </a:rPr>
-              <a:t>●   2. </a:t>
-            </a:r>
-            <a:r>
-              <a:rPr sz="1500" b="1" i="0">
-                <a:solidFill>
-                  <a:srgbClr val="2B2B2B"/>
-                </a:solidFill>
-                <a:latin typeface="Calibri"/>
-              </a:rPr>
-              <a:t>Incremental bien medido</a:t>
-            </a:r>
-            <a:r>
-              <a:rPr sz="1500" b="0" i="0">
-                <a:solidFill>
-                  <a:srgbClr val="2B2B2B"/>
-                </a:solidFill>
-                <a:latin typeface="Calibri"/>
-              </a:rPr>
-              <a:t> vence a radical sin evidencia.</a:t>
-            </a:r>
-          </a:p>
-          <a:p>
-            <a:pPr lvl="1">
-              <a:spcAft>
-                <a:spcPts val="600"/>
-              </a:spcAft>
-            </a:pPr>
-            <a:r>
-              <a:rPr sz="1500" b="0" i="0">
-                <a:solidFill>
-                  <a:srgbClr val="2B2B2B"/>
-                </a:solidFill>
-                <a:latin typeface="Calibri"/>
-              </a:rPr>
-              <a:t>●   3. Se compara con </a:t>
-            </a:r>
-            <a:r>
-              <a:rPr sz="1500" b="1" i="0">
-                <a:solidFill>
-                  <a:srgbClr val="2B2B2B"/>
-                </a:solidFill>
-                <a:latin typeface="Calibri"/>
-              </a:rPr>
-              <a:t>criterios</a:t>
-            </a:r>
-            <a:r>
-              <a:rPr sz="1500" b="0" i="0">
-                <a:solidFill>
-                  <a:srgbClr val="2B2B2B"/>
-                </a:solidFill>
-                <a:latin typeface="Calibri"/>
-              </a:rPr>
-              <a:t>, no con gusto.</a:t>
+              <a:t>5 criterios o más</a:t>
+            </a:r>
+            <a:r>
+              <a:rPr sz="1600" b="0" i="0">
+                <a:solidFill>
+                  <a:srgbClr val="2B2B2B"/>
+                </a:solidFill>
+                <a:latin typeface="Calibri"/>
+              </a:rPr>
+              <a:t>, escritos </a:t>
+            </a:r>
+            <a:r>
+              <a:rPr sz="1600" b="1" i="0">
+                <a:solidFill>
+                  <a:srgbClr val="2B2B2B"/>
+                </a:solidFill>
+                <a:latin typeface="Calibri"/>
+              </a:rPr>
+              <a:t>antes</a:t>
+            </a:r>
+            <a:r>
+              <a:rPr sz="1600" b="0" i="0">
+                <a:solidFill>
+                  <a:srgbClr val="2B2B2B"/>
+                </a:solidFill>
+                <a:latin typeface="Calibri"/>
+              </a:rPr>
+              <a:t> de puntuar.</a:t>
             </a:r>
           </a:p>
           <a:p>
@@ -7703,7 +7546,7 @@
                 </a:solidFill>
                 <a:latin typeface="Calibri"/>
               </a:rPr>
-              <a:t>–   </a:t>
+              <a:t>–   ☐ Puntué </a:t>
             </a:r>
             <a:r>
               <a:rPr sz="1600" b="1" i="0">
@@ -7712,16 +7555,16 @@
                 </a:solidFill>
                 <a:latin typeface="Calibri"/>
               </a:rPr>
-              <a:t>(a)</a:t>
-            </a:r>
-            <a:r>
-              <a:rPr sz="1600" b="0" i="0">
-                <a:solidFill>
-                  <a:srgbClr val="2B2B2B"/>
-                </a:solidFill>
-                <a:latin typeface="Calibri"/>
-              </a:rPr>
-              <a:t> Suban su matriz como </a:t>
+              <a:t>las dos columnas</a:t>
+            </a:r>
+            <a:r>
+              <a:rPr sz="1600" b="0" i="0">
+                <a:solidFill>
+                  <a:srgbClr val="2B2B2B"/>
+                </a:solidFill>
+                <a:latin typeface="Calibri"/>
+              </a:rPr>
+              <a:t> en </a:t>
             </a:r>
             <a:r>
               <a:rPr sz="1600" b="1" i="0">
@@ -7730,50 +7573,308 @@
                 </a:solidFill>
                 <a:latin typeface="Calibri"/>
               </a:rPr>
-              <a:t>`S04_MatrizTipos_Apellido`</a:t>
-            </a:r>
-            <a:r>
-              <a:rPr sz="1600" b="0" i="0">
-                <a:solidFill>
-                  <a:srgbClr val="2B2B2B"/>
-                </a:solidFill>
-                <a:latin typeface="Calibri"/>
-              </a:rPr>
-              <a:t> a </a:t>
-            </a:r>
-            <a:r>
-              <a:rPr sz="1600" b="1" i="0">
-                <a:solidFill>
-                  <a:srgbClr val="2B2B2B"/>
-                </a:solidFill>
-                <a:latin typeface="Calibri"/>
-              </a:rPr>
-              <a:t>CDigital</a:t>
-            </a:r>
-            <a:r>
-              <a:rPr sz="1600" b="0" i="0">
-                <a:solidFill>
-                  <a:srgbClr val="2B2B2B"/>
-                </a:solidFill>
-                <a:latin typeface="Calibri"/>
-              </a:rPr>
-              <a:t>.</a:t>
-            </a:r>
-          </a:p>
-          <a:p>
-            <a:pPr lvl="1">
+              <a:t>todas</a:t>
+            </a:r>
+            <a:r>
+              <a:rPr sz="1600" b="0" i="0">
+                <a:solidFill>
+                  <a:srgbClr val="2B2B2B"/>
+                </a:solidFill>
+                <a:latin typeface="Calibri"/>
+              </a:rPr>
+              <a:t> las filas — no dejé casillas vacías en la opción descartada.</a:t>
+            </a:r>
+          </a:p>
+          <a:p>
+            <a:pPr>
               <a:spcAft>
-                <a:spcPts val="600"/>
+                <a:spcPts val="1000"/>
               </a:spcAft>
             </a:pPr>
             <a:r>
-              <a:rPr sz="1500" b="0" i="0">
-                <a:solidFill>
-                  <a:srgbClr val="2B2B2B"/>
-                </a:solidFill>
-                <a:latin typeface="Calibri"/>
-              </a:rPr>
-              <a:t>●   Plataforma: [URL CDigital — campus del curso pendiente]</a:t>
+              <a:rPr sz="1600" b="0" i="0">
+                <a:solidFill>
+                  <a:srgbClr val="2B2B2B"/>
+                </a:solidFill>
+                <a:latin typeface="Calibri"/>
+              </a:rPr>
+              <a:t>–   ☐ </a:t>
+            </a:r>
+            <a:r>
+              <a:rPr sz="1600" b="1" i="0">
+                <a:solidFill>
+                  <a:srgbClr val="2B2B2B"/>
+                </a:solidFill>
+                <a:latin typeface="Calibri"/>
+              </a:rPr>
+              <a:t>No todas</a:t>
+            </a:r>
+            <a:r>
+              <a:rPr sz="1600" b="0" i="0">
+                <a:solidFill>
+                  <a:srgbClr val="2B2B2B"/>
+                </a:solidFill>
+                <a:latin typeface="Calibri"/>
+              </a:rPr>
+              <a:t> mis filas dan el mismo resultado: la matriz </a:t>
+            </a:r>
+            <a:r>
+              <a:rPr sz="1600" b="1" i="0">
+                <a:solidFill>
+                  <a:srgbClr val="2B2B2B"/>
+                </a:solidFill>
+                <a:latin typeface="Calibri"/>
+              </a:rPr>
+              <a:t>sí discrimina</a:t>
+            </a:r>
+            <a:r>
+              <a:rPr sz="1600" b="0" i="0">
+                <a:solidFill>
+                  <a:srgbClr val="2B2B2B"/>
+                </a:solidFill>
+                <a:latin typeface="Calibri"/>
+              </a:rPr>
+              <a:t>.</a:t>
+            </a:r>
+          </a:p>
+          <a:p>
+            <a:pPr>
+              <a:spcAft>
+                <a:spcPts val="1000"/>
+              </a:spcAft>
+            </a:pPr>
+            <a:r>
+              <a:rPr sz="1600" b="0" i="0">
+                <a:solidFill>
+                  <a:srgbClr val="2B2B2B"/>
+                </a:solidFill>
+                <a:latin typeface="Calibri"/>
+              </a:rPr>
+              <a:t>–   ☐ Al menos un criterio toca el contexto: </a:t>
+            </a:r>
+            <a:r>
+              <a:rPr sz="1600" b="1" i="0">
+                <a:solidFill>
+                  <a:srgbClr val="2B2B2B"/>
+                </a:solidFill>
+                <a:latin typeface="Calibri"/>
+              </a:rPr>
+              <a:t>quién paga, quién usa o qué restricción hay</a:t>
+            </a:r>
+            <a:r>
+              <a:rPr sz="1600" b="0" i="0">
+                <a:solidFill>
+                  <a:srgbClr val="2B2B2B"/>
+                </a:solidFill>
+                <a:latin typeface="Calibri"/>
+              </a:rPr>
+              <a:t>.</a:t>
+            </a:r>
+          </a:p>
+          <a:p>
+            <a:pPr>
+              <a:spcAft>
+                <a:spcPts val="1000"/>
+              </a:spcAft>
+            </a:pPr>
+            <a:r>
+              <a:rPr sz="1600" b="0" i="0">
+                <a:solidFill>
+                  <a:srgbClr val="2B2B2B"/>
+                </a:solidFill>
+                <a:latin typeface="Calibri"/>
+              </a:rPr>
+              <a:t>–   ☐ Declaré el </a:t>
+            </a:r>
+            <a:r>
+              <a:rPr sz="1600" b="1" i="0">
+                <a:solidFill>
+                  <a:srgbClr val="2B2B2B"/>
+                </a:solidFill>
+                <a:latin typeface="Calibri"/>
+              </a:rPr>
+              <a:t>grado</a:t>
+            </a:r>
+            <a:r>
+              <a:rPr sz="1600" b="0" i="0">
+                <a:solidFill>
+                  <a:srgbClr val="2B2B2B"/>
+                </a:solidFill>
+                <a:latin typeface="Calibri"/>
+              </a:rPr>
+              <a:t> (incremental / radical) y puedo decir </a:t>
+            </a:r>
+            <a:r>
+              <a:rPr sz="1600" b="1" i="0">
+                <a:solidFill>
+                  <a:srgbClr val="2B2B2B"/>
+                </a:solidFill>
+                <a:latin typeface="Calibri"/>
+              </a:rPr>
+              <a:t>con qué evidencia</a:t>
+            </a:r>
+            <a:r>
+              <a:rPr sz="1600" b="0" i="0">
+                <a:solidFill>
+                  <a:srgbClr val="2B2B2B"/>
+                </a:solidFill>
+                <a:latin typeface="Calibri"/>
+              </a:rPr>
+              <a:t> lo sostengo.</a:t>
+            </a:r>
+          </a:p>
+          <a:p>
+            <a:pPr>
+              <a:spcAft>
+                <a:spcPts val="1000"/>
+              </a:spcAft>
+            </a:pPr>
+            <a:r>
+              <a:rPr sz="1600" b="0" i="0">
+                <a:solidFill>
+                  <a:srgbClr val="2B2B2B"/>
+                </a:solidFill>
+                <a:latin typeface="Calibri"/>
+              </a:rPr>
+              <a:t>–   ☐ Mi conclusión menciona </a:t>
+            </a:r>
+            <a:r>
+              <a:rPr sz="1600" b="1" i="0">
+                <a:solidFill>
+                  <a:srgbClr val="2B2B2B"/>
+                </a:solidFill>
+                <a:latin typeface="Calibri"/>
+              </a:rPr>
+              <a:t>criterios por su nombre</a:t>
+            </a:r>
+            <a:r>
+              <a:rPr sz="1600" b="0" i="0">
+                <a:solidFill>
+                  <a:srgbClr val="2B2B2B"/>
+                </a:solidFill>
+                <a:latin typeface="Calibri"/>
+              </a:rPr>
+              <a:t>, no adjetivos.</a:t>
+            </a:r>
+          </a:p>
+          <a:p>
+            <a:pPr>
+              <a:spcAft>
+                <a:spcPts val="1000"/>
+              </a:spcAft>
+            </a:pPr>
+            <a:r>
+              <a:rPr sz="1600" b="0" i="0">
+                <a:solidFill>
+                  <a:srgbClr val="2B2B2B"/>
+                </a:solidFill>
+                <a:latin typeface="Calibri"/>
+              </a:rPr>
+              <a:t>–   ☐ Mi conclusión explica </a:t>
+            </a:r>
+            <a:r>
+              <a:rPr sz="1600" b="1" i="0">
+                <a:solidFill>
+                  <a:srgbClr val="2B2B2B"/>
+                </a:solidFill>
+                <a:latin typeface="Calibri"/>
+              </a:rPr>
+              <a:t>por qué descarto B</a:t>
+            </a:r>
+            <a:r>
+              <a:rPr sz="1600" b="0" i="0">
+                <a:solidFill>
+                  <a:srgbClr val="2B2B2B"/>
+                </a:solidFill>
+                <a:latin typeface="Calibri"/>
+              </a:rPr>
+              <a:t> sin descalificarlo.</a:t>
+            </a:r>
+          </a:p>
+          <a:p>
+            <a:pPr>
+              <a:spcAft>
+                <a:spcPts val="1000"/>
+              </a:spcAft>
+            </a:pPr>
+            <a:r>
+              <a:rPr sz="1600" b="0" i="0">
+                <a:solidFill>
+                  <a:srgbClr val="2B2B2B"/>
+                </a:solidFill>
+                <a:latin typeface="Calibri"/>
+              </a:rPr>
+              <a:t>–   ☐ El archivo se llama </a:t>
+            </a:r>
+            <a:r>
+              <a:rPr sz="1600" b="1" i="0">
+                <a:solidFill>
+                  <a:srgbClr val="2B2B2B"/>
+                </a:solidFill>
+                <a:latin typeface="Calibri"/>
+              </a:rPr>
+              <a:t>`S04_MatrizTipos_Apellido`</a:t>
+            </a:r>
+            <a:r>
+              <a:rPr sz="1600" b="0" i="0">
+                <a:solidFill>
+                  <a:srgbClr val="2B2B2B"/>
+                </a:solidFill>
+                <a:latin typeface="Calibri"/>
+              </a:rPr>
+              <a:t> y está en </a:t>
+            </a:r>
+            <a:r>
+              <a:rPr sz="1600" b="1" i="0">
+                <a:solidFill>
+                  <a:srgbClr val="2B2B2B"/>
+                </a:solidFill>
+                <a:latin typeface="Calibri"/>
+              </a:rPr>
+              <a:t>CDigital</a:t>
+            </a:r>
+            <a:r>
+              <a:rPr sz="1600" b="0" i="0">
+                <a:solidFill>
+                  <a:srgbClr val="2B2B2B"/>
+                </a:solidFill>
+                <a:latin typeface="Calibri"/>
+              </a:rPr>
+              <a:t>.</a:t>
+            </a:r>
+          </a:p>
+          <a:p>
+            <a:pPr>
+              <a:spcAft>
+                <a:spcPts val="1000"/>
+              </a:spcAft>
+            </a:pPr>
+            <a:r>
+              <a:rPr sz="1600" b="0" i="0">
+                <a:solidFill>
+                  <a:srgbClr val="2B2B2B"/>
+                </a:solidFill>
+                <a:latin typeface="Calibri"/>
+              </a:rPr>
+              <a:t>–   Prueba de honestidad: si al llenar la matriz </a:t>
+            </a:r>
+            <a:r>
+              <a:rPr sz="1600" b="1" i="0">
+                <a:solidFill>
+                  <a:srgbClr val="2B2B2B"/>
+                </a:solidFill>
+                <a:latin typeface="Calibri"/>
+              </a:rPr>
+              <a:t>ganó la opción B</a:t>
+            </a:r>
+            <a:r>
+              <a:rPr sz="1600" b="0" i="0">
+                <a:solidFill>
+                  <a:srgbClr val="2B2B2B"/>
+                </a:solidFill>
+                <a:latin typeface="Calibri"/>
+              </a:rPr>
+              <a:t>, cámbiese a B. Eso no es perder: es que el método funcionó.</a:t>
             </a:r>
           </a:p>
         </p:txBody>
@@ -7913,7 +8014,7 @@
                 </a:solidFill>
                 <a:latin typeface="Calibri"/>
               </a:rPr>
-              <a:t>Para continuar — trabajo autónomo (cont.)</a:t>
+              <a:t>Para continuar — trabajo autónomo</a:t>
             </a:r>
           </a:p>
         </p:txBody>
@@ -7961,34 +8062,7 @@
                 </a:solidFill>
                 <a:latin typeface="Calibri"/>
               </a:rPr>
-              <a:t>(b)</a:t>
-            </a:r>
-            <a:r>
-              <a:rPr sz="1600" b="0" i="0">
-                <a:solidFill>
-                  <a:srgbClr val="2B2B2B"/>
-                </a:solidFill>
-                <a:latin typeface="Calibri"/>
-              </a:rPr>
-              <a:t> Preparen un listado de </a:t>
-            </a:r>
-            <a:r>
-              <a:rPr sz="1600" b="1" i="0">
-                <a:solidFill>
-                  <a:srgbClr val="2B2B2B"/>
-                </a:solidFill>
-                <a:latin typeface="Calibri"/>
-              </a:rPr>
-              <a:t>mínimo 5 supuestos</a:t>
-            </a:r>
-            <a:r>
-              <a:rPr sz="1600" b="0" i="0">
-                <a:solidFill>
-                  <a:srgbClr val="2B2B2B"/>
-                </a:solidFill>
-                <a:latin typeface="Calibri"/>
-              </a:rPr>
-              <a:t> que su propuesta da por verdaderos.</a:t>
+              <a:t>Tres ideas para llevarse de hoy:</a:t>
             </a:r>
           </a:p>
           <a:p>
@@ -8004,7 +8078,7 @@
                 </a:solidFill>
                 <a:latin typeface="Calibri"/>
               </a:rPr>
-              <a:t>●   Un supuesto es algo que usted </a:t>
+              <a:t>●   1. El </a:t>
             </a:r>
             <a:r>
               <a:rPr sz="1500" b="1" i="0">
@@ -8013,7 +8087,7 @@
                 </a:solidFill>
                 <a:latin typeface="Calibri"/>
               </a:rPr>
-              <a:t>cree</a:t>
+              <a:t>tipo</a:t>
             </a:r>
             <a:r>
               <a:rPr sz="1500" b="0" i="0">
@@ -8022,7 +8096,7 @@
                 </a:solidFill>
                 <a:latin typeface="Calibri"/>
               </a:rPr>
-              <a:t> pero </a:t>
+              <a:t> dice qué cambia; el </a:t>
             </a:r>
             <a:r>
               <a:rPr sz="1500" b="1" i="0">
@@ -8031,7 +8105,7 @@
                 </a:solidFill>
                 <a:latin typeface="Calibri"/>
               </a:rPr>
-              <a:t>no ha comprobado</a:t>
+              <a:t>grado</a:t>
             </a:r>
             <a:r>
               <a:rPr sz="1500" b="0" i="0">
@@ -8040,25 +8114,7 @@
                 </a:solidFill>
                 <a:latin typeface="Calibri"/>
               </a:rPr>
-              <a:t>, y que si fuera falso </a:t>
-            </a:r>
-            <a:r>
-              <a:rPr sz="1500" b="1" i="0">
-                <a:solidFill>
-                  <a:srgbClr val="2B2B2B"/>
-                </a:solidFill>
-                <a:latin typeface="Calibri"/>
-              </a:rPr>
-              <a:t>tumbaría el proyecto</a:t>
-            </a:r>
-            <a:r>
-              <a:rPr sz="1500" b="0" i="0">
-                <a:solidFill>
-                  <a:srgbClr val="2B2B2B"/>
-                </a:solidFill>
-                <a:latin typeface="Calibri"/>
-              </a:rPr>
-              <a:t>.</a:t>
+              <a:t> dice cuánto rompe. Son dimensiones distintas.</a:t>
             </a:r>
           </a:p>
           <a:p>
@@ -8074,7 +8130,25 @@
                 </a:solidFill>
                 <a:latin typeface="Calibri"/>
               </a:rPr>
-              <a:t>●   Ejemplos del caso: "el estudiante estaría dispuesto a registrarse", "la ocupación real sigue el horario oficial", "el laboratorio permitiría el piloto".</a:t>
+              <a:t>●   2. </a:t>
+            </a:r>
+            <a:r>
+              <a:rPr sz="1500" b="1" i="0">
+                <a:solidFill>
+                  <a:srgbClr val="2B2B2B"/>
+                </a:solidFill>
+                <a:latin typeface="Calibri"/>
+              </a:rPr>
+              <a:t>Incremental bien medido</a:t>
+            </a:r>
+            <a:r>
+              <a:rPr sz="1500" b="0" i="0">
+                <a:solidFill>
+                  <a:srgbClr val="2B2B2B"/>
+                </a:solidFill>
+                <a:latin typeface="Calibri"/>
+              </a:rPr>
+              <a:t> vence a radical sin evidencia.</a:t>
             </a:r>
           </a:p>
           <a:p>
@@ -8090,7 +8164,25 @@
                 </a:solidFill>
                 <a:latin typeface="Calibri"/>
               </a:rPr>
-              <a:t>●   Escríbanlos como afirmaciones, no como preguntas — así se pueden poner a prueba.</a:t>
+              <a:t>●   3. Se compara con </a:t>
+            </a:r>
+            <a:r>
+              <a:rPr sz="1500" b="1" i="0">
+                <a:solidFill>
+                  <a:srgbClr val="2B2B2B"/>
+                </a:solidFill>
+                <a:latin typeface="Calibri"/>
+              </a:rPr>
+              <a:t>criterios</a:t>
+            </a:r>
+            <a:r>
+              <a:rPr sz="1500" b="0" i="0">
+                <a:solidFill>
+                  <a:srgbClr val="2B2B2B"/>
+                </a:solidFill>
+                <a:latin typeface="Calibri"/>
+              </a:rPr>
+              <a:t>, no con gusto.</a:t>
             </a:r>
           </a:p>
           <a:p>
@@ -8115,16 +8207,16 @@
                 </a:solidFill>
                 <a:latin typeface="Calibri"/>
               </a:rPr>
-              <a:t>(c)</a:t>
-            </a:r>
-            <a:r>
-              <a:rPr sz="1600" b="0" i="0">
-                <a:solidFill>
-                  <a:srgbClr val="2B2B2B"/>
-                </a:solidFill>
-                <a:latin typeface="Calibri"/>
-              </a:rPr>
-              <a:t> Anoten </a:t>
+              <a:t>(a)</a:t>
+            </a:r>
+            <a:r>
+              <a:rPr sz="1600" b="0" i="0">
+                <a:solidFill>
+                  <a:srgbClr val="2B2B2B"/>
+                </a:solidFill>
+                <a:latin typeface="Calibri"/>
+              </a:rPr>
+              <a:t> Suban su matriz como </a:t>
             </a:r>
             <a:r>
               <a:rPr sz="1600" b="1" i="0">
@@ -8133,32 +8225,16 @@
                 </a:solidFill>
                 <a:latin typeface="Calibri"/>
               </a:rPr>
-              <a:t>una pregunta sobre el entorno</a:t>
-            </a:r>
-            <a:r>
-              <a:rPr sz="1600" b="0" i="0">
-                <a:solidFill>
-                  <a:srgbClr val="2B2B2B"/>
-                </a:solidFill>
-                <a:latin typeface="Calibri"/>
-              </a:rPr>
-              <a:t> de su propuesta: ¿ya existe algo parecido? ¿hay una norma o un permiso de por medio? La segunda mitad de la próxima sesión arranca de ahí.</a:t>
-            </a:r>
-          </a:p>
-          <a:p>
-            <a:pPr>
-              <a:spcAft>
-                <a:spcPts val="1000"/>
-              </a:spcAft>
-            </a:pPr>
-            <a:r>
-              <a:rPr sz="1600" b="0" i="0">
-                <a:solidFill>
-                  <a:srgbClr val="2B2B2B"/>
-                </a:solidFill>
-                <a:latin typeface="Calibri"/>
-              </a:rPr>
-              <a:t>–   </a:t>
+              <a:t>`S04_MatrizTipos_Apellido`</a:t>
+            </a:r>
+            <a:r>
+              <a:rPr sz="1600" b="0" i="0">
+                <a:solidFill>
+                  <a:srgbClr val="2B2B2B"/>
+                </a:solidFill>
+                <a:latin typeface="Calibri"/>
+              </a:rPr>
+              <a:t> a </a:t>
             </a:r>
             <a:r>
               <a:rPr sz="1600" b="1" i="0">
@@ -8167,52 +8243,16 @@
                 </a:solidFill>
                 <a:latin typeface="Calibri"/>
               </a:rPr>
-              <a:t>Próxima sesión — es doble:</a:t>
-            </a:r>
-            <a:r>
-              <a:rPr sz="1600" b="0" i="0">
-                <a:solidFill>
-                  <a:srgbClr val="2B2B2B"/>
-                </a:solidFill>
-                <a:latin typeface="Calibri"/>
-              </a:rPr>
-              <a:t> </a:t>
-            </a:r>
-            <a:r>
-              <a:rPr sz="1600" b="1" i="0">
-                <a:solidFill>
-                  <a:srgbClr val="2B2B2B"/>
-                </a:solidFill>
-                <a:latin typeface="Calibri"/>
-              </a:rPr>
-              <a:t>FODA, Business Model Canvas y MVP</a:t>
-            </a:r>
-            <a:r>
-              <a:rPr sz="1600" b="0" i="0">
-                <a:solidFill>
-                  <a:srgbClr val="2B2B2B"/>
-                </a:solidFill>
-                <a:latin typeface="Calibri"/>
-              </a:rPr>
-              <a:t> para validar el supuesto más riesgoso, y </a:t>
-            </a:r>
-            <a:r>
-              <a:rPr sz="1600" b="1" i="0">
-                <a:solidFill>
-                  <a:srgbClr val="2B2B2B"/>
-                </a:solidFill>
-                <a:latin typeface="Calibri"/>
-              </a:rPr>
-              <a:t>vigilancia tecnológica</a:t>
-            </a:r>
-            <a:r>
-              <a:rPr sz="1600" b="0" i="0">
-                <a:solidFill>
-                  <a:srgbClr val="2B2B2B"/>
-                </a:solidFill>
-                <a:latin typeface="Calibri"/>
-              </a:rPr>
-              <a:t> para contrastar la propuesta con el entorno.</a:t>
+              <a:t>CDigital</a:t>
+            </a:r>
+            <a:r>
+              <a:rPr sz="1600" b="0" i="0">
+                <a:solidFill>
+                  <a:srgbClr val="2B2B2B"/>
+                </a:solidFill>
+                <a:latin typeface="Calibri"/>
+              </a:rPr>
+              <a:t>.</a:t>
             </a:r>
           </a:p>
           <a:p>
@@ -8228,25 +8268,7 @@
                 </a:solidFill>
                 <a:latin typeface="Calibri"/>
               </a:rPr>
-              <a:t>●   Se adelantó la vigilancia porque la </a:t>
-            </a:r>
-            <a:r>
-              <a:rPr sz="1500" b="1" i="0">
-                <a:solidFill>
-                  <a:srgbClr val="2B2B2B"/>
-                </a:solidFill>
-                <a:latin typeface="Calibri"/>
-              </a:rPr>
-              <a:t>ACA Final la califica</a:t>
-            </a:r>
-            <a:r>
-              <a:rPr sz="1500" b="0" i="0">
-                <a:solidFill>
-                  <a:srgbClr val="2B2B2B"/>
-                </a:solidFill>
-                <a:latin typeface="Calibri"/>
-              </a:rPr>
-              <a:t> y cierra antes de la última sesión del curso. Vengan con los supuestos escritos.</a:t>
+              <a:t>●   Plataforma: https://cdigital.cun.edu.co/course/view.php?id=115463</a:t>
             </a:r>
           </a:p>
         </p:txBody>
@@ -8295,6 +8317,2086 @@
 </file>
 
 <file path=ppt/slides/slide19.xml><?xml version="1.0" encoding="utf-8"?>
+<p:sld xmlns:a="http://schemas.openxmlformats.org/drawingml/2006/main" xmlns:p="http://schemas.openxmlformats.org/presentationml/2006/main" xmlns:r="http://schemas.openxmlformats.org/officeDocument/2006/relationships">
+  <p:cSld>
+    <p:bg>
+      <p:bgPr>
+        <a:solidFill>
+          <a:srgbClr val="FFFFFF"/>
+        </a:solidFill>
+        <a:effectLst/>
+      </p:bgPr>
+    </p:bg>
+    <p:spTree>
+      <p:nvGrpSpPr>
+        <p:cNvPr id="1" name=""/>
+        <p:cNvGrpSpPr/>
+        <p:nvPr/>
+      </p:nvGrpSpPr>
+      <p:grpSpPr/>
+      <p:sp>
+        <p:nvSpPr>
+          <p:cNvPr id="2" name="Rectangle 1"/>
+          <p:cNvSpPr/>
+          <p:nvPr/>
+        </p:nvSpPr>
+        <p:spPr>
+          <a:xfrm>
+            <a:off x="0" y="0"/>
+            <a:ext cx="12191695" cy="1188720"/>
+          </a:xfrm>
+          <a:prstGeom prst="rect">
+            <a:avLst/>
+          </a:prstGeom>
+          <a:solidFill>
+            <a:srgbClr val="0C2340"/>
+          </a:solidFill>
+          <a:ln>
+            <a:noFill/>
+          </a:ln>
+          <a:effectLst/>
+        </p:spPr>
+        <p:style>
+          <a:lnRef idx="1">
+            <a:schemeClr val="accent1"/>
+          </a:lnRef>
+          <a:fillRef idx="3">
+            <a:schemeClr val="accent1"/>
+          </a:fillRef>
+          <a:effectRef idx="2">
+            <a:schemeClr val="accent1"/>
+          </a:effectRef>
+          <a:fontRef idx="minor">
+            <a:schemeClr val="lt1"/>
+          </a:fontRef>
+        </p:style>
+        <p:txBody>
+          <a:bodyPr rtlCol="0" anchor="ctr"/>
+          <a:lstStyle/>
+          <a:p>
+            <a:pPr algn="ctr"/>
+          </a:p>
+        </p:txBody>
+      </p:sp>
+      <p:sp>
+        <p:nvSpPr>
+          <p:cNvPr id="3" name="TextBox 2"/>
+          <p:cNvSpPr txBox="1"/>
+          <p:nvPr/>
+        </p:nvSpPr>
+        <p:spPr>
+          <a:xfrm>
+            <a:off x="640080" y="0"/>
+            <a:ext cx="9082735" cy="1188720"/>
+          </a:xfrm>
+          <a:prstGeom prst="rect">
+            <a:avLst/>
+          </a:prstGeom>
+          <a:noFill/>
+        </p:spPr>
+        <p:txBody>
+          <a:bodyPr wrap="square" anchor="ctr" lIns="0" rIns="0" tIns="0" bIns="0">
+            <a:spAutoFit/>
+          </a:bodyPr>
+          <a:lstStyle/>
+          <a:p>
+            <a:pPr algn="ctr"/>
+            <a:r>
+              <a:rPr sz="2600" b="1" i="0">
+                <a:solidFill>
+                  <a:srgbClr val="FFFFFF"/>
+                </a:solidFill>
+                <a:latin typeface="Calibri"/>
+              </a:rPr>
+              <a:t>Para continuar — trabajo autónomo (cont.)</a:t>
+            </a:r>
+          </a:p>
+        </p:txBody>
+      </p:sp>
+      <p:sp>
+        <p:nvSpPr>
+          <p:cNvPr id="4" name="TextBox 3"/>
+          <p:cNvSpPr txBox="1"/>
+          <p:nvPr/>
+        </p:nvSpPr>
+        <p:spPr>
+          <a:xfrm>
+            <a:off x="640080" y="1691639"/>
+            <a:ext cx="10911535" cy="4617720"/>
+          </a:xfrm>
+          <a:prstGeom prst="rect">
+            <a:avLst/>
+          </a:prstGeom>
+          <a:noFill/>
+        </p:spPr>
+        <p:txBody>
+          <a:bodyPr wrap="square" anchor="t" lIns="0" rIns="0" tIns="0" bIns="0">
+            <a:spAutoFit/>
+          </a:bodyPr>
+          <a:lstStyle/>
+          <a:p>
+            <a:pPr>
+              <a:spcAft>
+                <a:spcPts val="1000"/>
+              </a:spcAft>
+            </a:pPr>
+            <a:r>
+              <a:rPr sz="1600" b="0" i="0">
+                <a:solidFill>
+                  <a:srgbClr val="2B2B2B"/>
+                </a:solidFill>
+                <a:latin typeface="Calibri"/>
+              </a:rPr>
+              <a:t>–   </a:t>
+            </a:r>
+            <a:r>
+              <a:rPr sz="1600" b="1" i="0">
+                <a:solidFill>
+                  <a:srgbClr val="2B2B2B"/>
+                </a:solidFill>
+                <a:latin typeface="Calibri"/>
+              </a:rPr>
+              <a:t>(b)</a:t>
+            </a:r>
+            <a:r>
+              <a:rPr sz="1600" b="0" i="0">
+                <a:solidFill>
+                  <a:srgbClr val="2B2B2B"/>
+                </a:solidFill>
+                <a:latin typeface="Calibri"/>
+              </a:rPr>
+              <a:t> Preparen un listado de </a:t>
+            </a:r>
+            <a:r>
+              <a:rPr sz="1600" b="1" i="0">
+                <a:solidFill>
+                  <a:srgbClr val="2B2B2B"/>
+                </a:solidFill>
+                <a:latin typeface="Calibri"/>
+              </a:rPr>
+              <a:t>mínimo 5 supuestos</a:t>
+            </a:r>
+            <a:r>
+              <a:rPr sz="1600" b="0" i="0">
+                <a:solidFill>
+                  <a:srgbClr val="2B2B2B"/>
+                </a:solidFill>
+                <a:latin typeface="Calibri"/>
+              </a:rPr>
+              <a:t> que su propuesta da por verdaderos.</a:t>
+            </a:r>
+          </a:p>
+          <a:p>
+            <a:pPr lvl="1">
+              <a:spcAft>
+                <a:spcPts val="600"/>
+              </a:spcAft>
+            </a:pPr>
+            <a:r>
+              <a:rPr sz="1500" b="0" i="0">
+                <a:solidFill>
+                  <a:srgbClr val="2B2B2B"/>
+                </a:solidFill>
+                <a:latin typeface="Calibri"/>
+              </a:rPr>
+              <a:t>●   Un supuesto es algo que usted </a:t>
+            </a:r>
+            <a:r>
+              <a:rPr sz="1500" b="1" i="0">
+                <a:solidFill>
+                  <a:srgbClr val="2B2B2B"/>
+                </a:solidFill>
+                <a:latin typeface="Calibri"/>
+              </a:rPr>
+              <a:t>cree</a:t>
+            </a:r>
+            <a:r>
+              <a:rPr sz="1500" b="0" i="0">
+                <a:solidFill>
+                  <a:srgbClr val="2B2B2B"/>
+                </a:solidFill>
+                <a:latin typeface="Calibri"/>
+              </a:rPr>
+              <a:t> pero </a:t>
+            </a:r>
+            <a:r>
+              <a:rPr sz="1500" b="1" i="0">
+                <a:solidFill>
+                  <a:srgbClr val="2B2B2B"/>
+                </a:solidFill>
+                <a:latin typeface="Calibri"/>
+              </a:rPr>
+              <a:t>no ha comprobado</a:t>
+            </a:r>
+            <a:r>
+              <a:rPr sz="1500" b="0" i="0">
+                <a:solidFill>
+                  <a:srgbClr val="2B2B2B"/>
+                </a:solidFill>
+                <a:latin typeface="Calibri"/>
+              </a:rPr>
+              <a:t>, y que si fuera falso </a:t>
+            </a:r>
+            <a:r>
+              <a:rPr sz="1500" b="1" i="0">
+                <a:solidFill>
+                  <a:srgbClr val="2B2B2B"/>
+                </a:solidFill>
+                <a:latin typeface="Calibri"/>
+              </a:rPr>
+              <a:t>tumbaría el proyecto</a:t>
+            </a:r>
+            <a:r>
+              <a:rPr sz="1500" b="0" i="0">
+                <a:solidFill>
+                  <a:srgbClr val="2B2B2B"/>
+                </a:solidFill>
+                <a:latin typeface="Calibri"/>
+              </a:rPr>
+              <a:t>.</a:t>
+            </a:r>
+          </a:p>
+          <a:p>
+            <a:pPr lvl="1">
+              <a:spcAft>
+                <a:spcPts val="600"/>
+              </a:spcAft>
+            </a:pPr>
+            <a:r>
+              <a:rPr sz="1500" b="0" i="0">
+                <a:solidFill>
+                  <a:srgbClr val="2B2B2B"/>
+                </a:solidFill>
+                <a:latin typeface="Calibri"/>
+              </a:rPr>
+              <a:t>●   Ejemplos del caso: "el estudiante estaría dispuesto a registrarse", "la ocupación real sigue el horario oficial", "el laboratorio permitiría el piloto".</a:t>
+            </a:r>
+          </a:p>
+          <a:p>
+            <a:pPr lvl="1">
+              <a:spcAft>
+                <a:spcPts val="600"/>
+              </a:spcAft>
+            </a:pPr>
+            <a:r>
+              <a:rPr sz="1500" b="0" i="0">
+                <a:solidFill>
+                  <a:srgbClr val="2B2B2B"/>
+                </a:solidFill>
+                <a:latin typeface="Calibri"/>
+              </a:rPr>
+              <a:t>●   Escríbanlos como afirmaciones, no como preguntas — así se pueden poner a prueba.</a:t>
+            </a:r>
+          </a:p>
+          <a:p>
+            <a:pPr>
+              <a:spcAft>
+                <a:spcPts val="1000"/>
+              </a:spcAft>
+            </a:pPr>
+            <a:r>
+              <a:rPr sz="1600" b="0" i="0">
+                <a:solidFill>
+                  <a:srgbClr val="2B2B2B"/>
+                </a:solidFill>
+                <a:latin typeface="Calibri"/>
+              </a:rPr>
+              <a:t>–   </a:t>
+            </a:r>
+            <a:r>
+              <a:rPr sz="1600" b="1" i="0">
+                <a:solidFill>
+                  <a:srgbClr val="2B2B2B"/>
+                </a:solidFill>
+                <a:latin typeface="Calibri"/>
+              </a:rPr>
+              <a:t>(c)</a:t>
+            </a:r>
+            <a:r>
+              <a:rPr sz="1600" b="0" i="0">
+                <a:solidFill>
+                  <a:srgbClr val="2B2B2B"/>
+                </a:solidFill>
+                <a:latin typeface="Calibri"/>
+              </a:rPr>
+              <a:t> Anoten </a:t>
+            </a:r>
+            <a:r>
+              <a:rPr sz="1600" b="1" i="0">
+                <a:solidFill>
+                  <a:srgbClr val="2B2B2B"/>
+                </a:solidFill>
+                <a:latin typeface="Calibri"/>
+              </a:rPr>
+              <a:t>una pregunta sobre el entorno</a:t>
+            </a:r>
+            <a:r>
+              <a:rPr sz="1600" b="0" i="0">
+                <a:solidFill>
+                  <a:srgbClr val="2B2B2B"/>
+                </a:solidFill>
+                <a:latin typeface="Calibri"/>
+              </a:rPr>
+              <a:t> de su propuesta: ¿ya existe algo parecido? ¿hay una norma o un permiso de por medio? La segunda mitad de la próxima sesión arranca de ahí.</a:t>
+            </a:r>
+          </a:p>
+          <a:p>
+            <a:pPr>
+              <a:spcAft>
+                <a:spcPts val="1000"/>
+              </a:spcAft>
+            </a:pPr>
+            <a:r>
+              <a:rPr sz="1600" b="0" i="0">
+                <a:solidFill>
+                  <a:srgbClr val="2B2B2B"/>
+                </a:solidFill>
+                <a:latin typeface="Calibri"/>
+              </a:rPr>
+              <a:t>–   </a:t>
+            </a:r>
+            <a:r>
+              <a:rPr sz="1600" b="1" i="0">
+                <a:solidFill>
+                  <a:srgbClr val="2B2B2B"/>
+                </a:solidFill>
+                <a:latin typeface="Calibri"/>
+              </a:rPr>
+              <a:t>Próxima sesión — es doble:</a:t>
+            </a:r>
+            <a:r>
+              <a:rPr sz="1600" b="0" i="0">
+                <a:solidFill>
+                  <a:srgbClr val="2B2B2B"/>
+                </a:solidFill>
+                <a:latin typeface="Calibri"/>
+              </a:rPr>
+              <a:t> </a:t>
+            </a:r>
+            <a:r>
+              <a:rPr sz="1600" b="1" i="0">
+                <a:solidFill>
+                  <a:srgbClr val="2B2B2B"/>
+                </a:solidFill>
+                <a:latin typeface="Calibri"/>
+              </a:rPr>
+              <a:t>FODA, Business Model Canvas y MVP</a:t>
+            </a:r>
+            <a:r>
+              <a:rPr sz="1600" b="0" i="0">
+                <a:solidFill>
+                  <a:srgbClr val="2B2B2B"/>
+                </a:solidFill>
+                <a:latin typeface="Calibri"/>
+              </a:rPr>
+              <a:t> para validar el supuesto más riesgoso, y </a:t>
+            </a:r>
+            <a:r>
+              <a:rPr sz="1600" b="1" i="0">
+                <a:solidFill>
+                  <a:srgbClr val="2B2B2B"/>
+                </a:solidFill>
+                <a:latin typeface="Calibri"/>
+              </a:rPr>
+              <a:t>vigilancia tecnológica</a:t>
+            </a:r>
+            <a:r>
+              <a:rPr sz="1600" b="0" i="0">
+                <a:solidFill>
+                  <a:srgbClr val="2B2B2B"/>
+                </a:solidFill>
+                <a:latin typeface="Calibri"/>
+              </a:rPr>
+              <a:t> para contrastar la propuesta con el entorno.</a:t>
+            </a:r>
+          </a:p>
+          <a:p>
+            <a:pPr lvl="1">
+              <a:spcAft>
+                <a:spcPts val="600"/>
+              </a:spcAft>
+            </a:pPr>
+            <a:r>
+              <a:rPr sz="1500" b="0" i="0">
+                <a:solidFill>
+                  <a:srgbClr val="2B2B2B"/>
+                </a:solidFill>
+                <a:latin typeface="Calibri"/>
+              </a:rPr>
+              <a:t>●   Se adelantó la vigilancia porque la </a:t>
+            </a:r>
+            <a:r>
+              <a:rPr sz="1500" b="1" i="0">
+                <a:solidFill>
+                  <a:srgbClr val="2B2B2B"/>
+                </a:solidFill>
+                <a:latin typeface="Calibri"/>
+              </a:rPr>
+              <a:t>ACA Final la califica</a:t>
+            </a:r>
+            <a:r>
+              <a:rPr sz="1500" b="0" i="0">
+                <a:solidFill>
+                  <a:srgbClr val="2B2B2B"/>
+                </a:solidFill>
+                <a:latin typeface="Calibri"/>
+              </a:rPr>
+              <a:t> y cierra antes de la última sesión del curso. Vengan con los supuestos escritos.</a:t>
+            </a:r>
+          </a:p>
+        </p:txBody>
+      </p:sp>
+      <p:sp>
+        <p:nvSpPr>
+          <p:cNvPr id="5" name="TextBox 4"/>
+          <p:cNvSpPr txBox="1"/>
+          <p:nvPr/>
+        </p:nvSpPr>
+        <p:spPr>
+          <a:xfrm>
+            <a:off x="11094415" y="6446520"/>
+            <a:ext cx="548640" cy="274320"/>
+          </a:xfrm>
+          <a:prstGeom prst="rect">
+            <a:avLst/>
+          </a:prstGeom>
+          <a:noFill/>
+        </p:spPr>
+        <p:txBody>
+          <a:bodyPr wrap="square" anchor="t" lIns="0" rIns="0" tIns="0" bIns="0">
+            <a:spAutoFit/>
+          </a:bodyPr>
+          <a:lstStyle/>
+          <a:p>
+            <a:pPr algn="r"/>
+            <a:r>
+              <a:rPr sz="1000" b="1" i="0">
+                <a:solidFill>
+                  <a:srgbClr val="8F989D"/>
+                </a:solidFill>
+                <a:latin typeface="Calibri"/>
+              </a:rPr>
+              <a:t>19</a:t>
+            </a:r>
+          </a:p>
+        </p:txBody>
+      </p:sp>
+    </p:spTree>
+  </p:cSld>
+  <p:clrMapOvr>
+    <a:masterClrMapping/>
+  </p:clrMapOvr>
+</p:sld>
+</file>
+
+<file path=ppt/slides/slide2.xml><?xml version="1.0" encoding="utf-8"?>
+<p:sld xmlns:a="http://schemas.openxmlformats.org/drawingml/2006/main" xmlns:p="http://schemas.openxmlformats.org/presentationml/2006/main" xmlns:r="http://schemas.openxmlformats.org/officeDocument/2006/relationships">
+  <p:cSld>
+    <p:bg>
+      <p:bgPr>
+        <a:solidFill>
+          <a:srgbClr val="FFFFFF"/>
+        </a:solidFill>
+        <a:effectLst/>
+      </p:bgPr>
+    </p:bg>
+    <p:spTree>
+      <p:nvGrpSpPr>
+        <p:cNvPr id="1" name=""/>
+        <p:cNvGrpSpPr/>
+        <p:nvPr/>
+      </p:nvGrpSpPr>
+      <p:grpSpPr/>
+      <p:sp>
+        <p:nvSpPr>
+          <p:cNvPr id="2" name="Rectangle 1"/>
+          <p:cNvSpPr/>
+          <p:nvPr/>
+        </p:nvSpPr>
+        <p:spPr>
+          <a:xfrm>
+            <a:off x="0" y="0"/>
+            <a:ext cx="12191695" cy="1188720"/>
+          </a:xfrm>
+          <a:prstGeom prst="rect">
+            <a:avLst/>
+          </a:prstGeom>
+          <a:solidFill>
+            <a:srgbClr val="0C2340"/>
+          </a:solidFill>
+          <a:ln>
+            <a:noFill/>
+          </a:ln>
+          <a:effectLst/>
+        </p:spPr>
+        <p:style>
+          <a:lnRef idx="1">
+            <a:schemeClr val="accent1"/>
+          </a:lnRef>
+          <a:fillRef idx="3">
+            <a:schemeClr val="accent1"/>
+          </a:fillRef>
+          <a:effectRef idx="2">
+            <a:schemeClr val="accent1"/>
+          </a:effectRef>
+          <a:fontRef idx="minor">
+            <a:schemeClr val="lt1"/>
+          </a:fontRef>
+        </p:style>
+        <p:txBody>
+          <a:bodyPr rtlCol="0" anchor="ctr"/>
+          <a:lstStyle/>
+          <a:p>
+            <a:pPr algn="ctr"/>
+          </a:p>
+        </p:txBody>
+      </p:sp>
+      <p:sp>
+        <p:nvSpPr>
+          <p:cNvPr id="3" name="TextBox 2"/>
+          <p:cNvSpPr txBox="1"/>
+          <p:nvPr/>
+        </p:nvSpPr>
+        <p:spPr>
+          <a:xfrm>
+            <a:off x="640080" y="0"/>
+            <a:ext cx="9082735" cy="1188720"/>
+          </a:xfrm>
+          <a:prstGeom prst="rect">
+            <a:avLst/>
+          </a:prstGeom>
+          <a:noFill/>
+        </p:spPr>
+        <p:txBody>
+          <a:bodyPr wrap="square" anchor="ctr" lIns="0" rIns="0" tIns="0" bIns="0">
+            <a:spAutoFit/>
+          </a:bodyPr>
+          <a:lstStyle/>
+          <a:p>
+            <a:pPr algn="ctr"/>
+            <a:r>
+              <a:rPr sz="2600" b="1" i="0">
+                <a:solidFill>
+                  <a:srgbClr val="FFFFFF"/>
+                </a:solidFill>
+                <a:latin typeface="Calibri"/>
+              </a:rPr>
+              <a:t>Una etiqueta no defiende nada</a:t>
+            </a:r>
+          </a:p>
+        </p:txBody>
+      </p:sp>
+      <p:sp>
+        <p:nvSpPr>
+          <p:cNvPr id="4" name="TextBox 3"/>
+          <p:cNvSpPr txBox="1"/>
+          <p:nvPr/>
+        </p:nvSpPr>
+        <p:spPr>
+          <a:xfrm>
+            <a:off x="640080" y="1691639"/>
+            <a:ext cx="10911535" cy="4617720"/>
+          </a:xfrm>
+          <a:prstGeom prst="rect">
+            <a:avLst/>
+          </a:prstGeom>
+          <a:noFill/>
+        </p:spPr>
+        <p:txBody>
+          <a:bodyPr wrap="square" anchor="t" lIns="0" rIns="0" tIns="0" bIns="0">
+            <a:spAutoFit/>
+          </a:bodyPr>
+          <a:lstStyle/>
+          <a:p>
+            <a:pPr>
+              <a:spcAft>
+                <a:spcPts val="1000"/>
+              </a:spcAft>
+            </a:pPr>
+            <a:r>
+              <a:rPr sz="1600" b="0" i="0">
+                <a:solidFill>
+                  <a:srgbClr val="2B2B2B"/>
+                </a:solidFill>
+                <a:latin typeface="Calibri"/>
+              </a:rPr>
+              <a:t>–   La sesión pasada le pusieron una </a:t>
+            </a:r>
+            <a:r>
+              <a:rPr sz="1600" b="1" i="0">
+                <a:solidFill>
+                  <a:srgbClr val="2B2B2B"/>
+                </a:solidFill>
+                <a:latin typeface="Calibri"/>
+              </a:rPr>
+              <a:t>etiqueta</a:t>
+            </a:r>
+            <a:r>
+              <a:rPr sz="1600" b="0" i="0">
+                <a:solidFill>
+                  <a:srgbClr val="2B2B2B"/>
+                </a:solidFill>
+                <a:latin typeface="Calibri"/>
+              </a:rPr>
+              <a:t> Oslo a su propuesta: producto, proceso, organización, marketing o social.</a:t>
+            </a:r>
+          </a:p>
+          <a:p>
+            <a:pPr>
+              <a:spcAft>
+                <a:spcPts val="1000"/>
+              </a:spcAft>
+            </a:pPr>
+            <a:r>
+              <a:rPr sz="1600" b="0" i="0">
+                <a:solidFill>
+                  <a:srgbClr val="2B2B2B"/>
+                </a:solidFill>
+                <a:latin typeface="Calibri"/>
+              </a:rPr>
+              <a:t>–   Hoy sube la exigencia: </a:t>
+            </a:r>
+            <a:r>
+              <a:rPr sz="1600" b="1" i="0">
+                <a:solidFill>
+                  <a:srgbClr val="2B2B2B"/>
+                </a:solidFill>
+                <a:latin typeface="Calibri"/>
+              </a:rPr>
+              <a:t>no basta con la etiqueta, hay que argumentar por qué ESE tipo y no otro</a:t>
+            </a:r>
+            <a:r>
+              <a:rPr sz="1600" b="0" i="0">
+                <a:solidFill>
+                  <a:srgbClr val="2B2B2B"/>
+                </a:solidFill>
+                <a:latin typeface="Calibri"/>
+              </a:rPr>
+              <a:t>.</a:t>
+            </a:r>
+          </a:p>
+          <a:p>
+            <a:pPr>
+              <a:spcAft>
+                <a:spcPts val="1000"/>
+              </a:spcAft>
+            </a:pPr>
+            <a:r>
+              <a:rPr sz="1600" b="0" i="0">
+                <a:solidFill>
+                  <a:srgbClr val="2B2B2B"/>
+                </a:solidFill>
+                <a:latin typeface="Calibri"/>
+              </a:rPr>
+              <a:t>–   La escena que se van a encontrar en la sustentación:</a:t>
+            </a:r>
+          </a:p>
+          <a:p>
+            <a:pPr lvl="1">
+              <a:spcAft>
+                <a:spcPts val="600"/>
+              </a:spcAft>
+            </a:pPr>
+            <a:r>
+              <a:rPr sz="1500" b="0" i="0">
+                <a:solidFill>
+                  <a:srgbClr val="2B2B2B"/>
+                </a:solidFill>
+                <a:latin typeface="Calibri"/>
+              </a:rPr>
+              <a:t>●   — "Mi innovación es de producto." — "¿Por qué no de proceso?" — silencio.</a:t>
+            </a:r>
+          </a:p>
+          <a:p>
+            <a:pPr lvl="1">
+              <a:spcAft>
+                <a:spcPts val="600"/>
+              </a:spcAft>
+            </a:pPr>
+            <a:r>
+              <a:rPr sz="1500" b="0" i="0">
+                <a:solidFill>
+                  <a:srgbClr val="2B2B2B"/>
+                </a:solidFill>
+                <a:latin typeface="Calibri"/>
+              </a:rPr>
+              <a:t>●   Ese silencio no se llena con más entusiasmo: se llena con </a:t>
+            </a:r>
+            <a:r>
+              <a:rPr sz="1500" b="1" i="0">
+                <a:solidFill>
+                  <a:srgbClr val="2B2B2B"/>
+                </a:solidFill>
+                <a:latin typeface="Calibri"/>
+              </a:rPr>
+              <a:t>criterios</a:t>
+            </a:r>
+            <a:r>
+              <a:rPr sz="1500" b="0" i="0">
+                <a:solidFill>
+                  <a:srgbClr val="2B2B2B"/>
+                </a:solidFill>
+                <a:latin typeface="Calibri"/>
+              </a:rPr>
+              <a:t>.</a:t>
+            </a:r>
+          </a:p>
+          <a:p>
+            <a:pPr>
+              <a:spcAft>
+                <a:spcPts val="1000"/>
+              </a:spcAft>
+            </a:pPr>
+            <a:r>
+              <a:rPr sz="1600" b="0" i="0">
+                <a:solidFill>
+                  <a:srgbClr val="2B2B2B"/>
+                </a:solidFill>
+                <a:latin typeface="Calibri"/>
+              </a:rPr>
+              <a:t>–   Y una segunda escena, igual de común: escribir </a:t>
+            </a:r>
+            <a:r>
+              <a:rPr sz="1600" b="1" i="0">
+                <a:solidFill>
+                  <a:srgbClr val="2B2B2B"/>
+                </a:solidFill>
+                <a:latin typeface="Calibri"/>
+              </a:rPr>
+              <a:t>"mi innovación es radical"</a:t>
+            </a:r>
+            <a:r>
+              <a:rPr sz="1600" b="0" i="0">
+                <a:solidFill>
+                  <a:srgbClr val="2B2B2B"/>
+                </a:solidFill>
+                <a:latin typeface="Calibri"/>
+              </a:rPr>
+              <a:t> como adorno, sin un solo dato.</a:t>
+            </a:r>
+          </a:p>
+          <a:p>
+            <a:pPr lvl="1">
+              <a:spcAft>
+                <a:spcPts val="600"/>
+              </a:spcAft>
+            </a:pPr>
+            <a:r>
+              <a:rPr sz="1500" b="0" i="0">
+                <a:solidFill>
+                  <a:srgbClr val="2B2B2B"/>
+                </a:solidFill>
+                <a:latin typeface="Calibri"/>
+              </a:rPr>
+              <a:t>●   Hoy vamos a ver por qué eso los debilita en vez de fortalecerlos.</a:t>
+            </a:r>
+          </a:p>
+          <a:p>
+            <a:pPr>
+              <a:spcAft>
+                <a:spcPts val="1000"/>
+              </a:spcAft>
+            </a:pPr>
+            <a:r>
+              <a:rPr sz="1600" b="0" i="0">
+                <a:solidFill>
+                  <a:srgbClr val="2B2B2B"/>
+                </a:solidFill>
+                <a:latin typeface="Calibri"/>
+              </a:rPr>
+              <a:t>–   Producto de la hora: una </a:t>
+            </a:r>
+            <a:r>
+              <a:rPr sz="1600" b="1" i="0">
+                <a:solidFill>
+                  <a:srgbClr val="2B2B2B"/>
+                </a:solidFill>
+                <a:latin typeface="Calibri"/>
+              </a:rPr>
+              <a:t>matriz comparativa</a:t>
+            </a:r>
+            <a:r>
+              <a:rPr sz="1600" b="0" i="0">
+                <a:solidFill>
+                  <a:srgbClr val="2B2B2B"/>
+                </a:solidFill>
+                <a:latin typeface="Calibri"/>
+              </a:rPr>
+              <a:t> —su tipo elegido contra una alternativa— con criterios claros y una </a:t>
+            </a:r>
+            <a:r>
+              <a:rPr sz="1600" b="1" i="0">
+                <a:solidFill>
+                  <a:srgbClr val="2B2B2B"/>
+                </a:solidFill>
+                <a:latin typeface="Calibri"/>
+              </a:rPr>
+              <a:t>conclusión escrita de 4 líneas</a:t>
+            </a:r>
+            <a:r>
+              <a:rPr sz="1600" b="0" i="0">
+                <a:solidFill>
+                  <a:srgbClr val="2B2B2B"/>
+                </a:solidFill>
+                <a:latin typeface="Calibri"/>
+              </a:rPr>
+              <a:t>.</a:t>
+            </a:r>
+          </a:p>
+        </p:txBody>
+      </p:sp>
+      <p:sp>
+        <p:nvSpPr>
+          <p:cNvPr id="5" name="TextBox 4"/>
+          <p:cNvSpPr txBox="1"/>
+          <p:nvPr/>
+        </p:nvSpPr>
+        <p:spPr>
+          <a:xfrm>
+            <a:off x="11094415" y="6446520"/>
+            <a:ext cx="548640" cy="274320"/>
+          </a:xfrm>
+          <a:prstGeom prst="rect">
+            <a:avLst/>
+          </a:prstGeom>
+          <a:noFill/>
+        </p:spPr>
+        <p:txBody>
+          <a:bodyPr wrap="square" anchor="t" lIns="0" rIns="0" tIns="0" bIns="0">
+            <a:spAutoFit/>
+          </a:bodyPr>
+          <a:lstStyle/>
+          <a:p>
+            <a:pPr algn="r"/>
+            <a:r>
+              <a:rPr sz="1000" b="1" i="0">
+                <a:solidFill>
+                  <a:srgbClr val="8F989D"/>
+                </a:solidFill>
+                <a:latin typeface="Calibri"/>
+              </a:rPr>
+              <a:t>2</a:t>
+            </a:r>
+          </a:p>
+        </p:txBody>
+      </p:sp>
+    </p:spTree>
+  </p:cSld>
+  <p:clrMapOvr>
+    <a:masterClrMapping/>
+  </p:clrMapOvr>
+</p:sld>
+</file>
+
+<file path=ppt/slides/slide20.xml><?xml version="1.0" encoding="utf-8"?>
+<p:sld xmlns:a="http://schemas.openxmlformats.org/drawingml/2006/main" xmlns:p="http://schemas.openxmlformats.org/presentationml/2006/main" xmlns:r="http://schemas.openxmlformats.org/officeDocument/2006/relationships">
+  <p:cSld>
+    <p:bg>
+      <p:bgPr>
+        <a:solidFill>
+          <a:srgbClr val="FFFFFF"/>
+        </a:solidFill>
+        <a:effectLst/>
+      </p:bgPr>
+    </p:bg>
+    <p:spTree>
+      <p:nvGrpSpPr>
+        <p:cNvPr id="1" name=""/>
+        <p:cNvGrpSpPr/>
+        <p:nvPr/>
+      </p:nvGrpSpPr>
+      <p:grpSpPr/>
+      <p:sp>
+        <p:nvSpPr>
+          <p:cNvPr id="2" name="Rectangle 1"/>
+          <p:cNvSpPr/>
+          <p:nvPr/>
+        </p:nvSpPr>
+        <p:spPr>
+          <a:xfrm>
+            <a:off x="0" y="0"/>
+            <a:ext cx="12191695" cy="1188720"/>
+          </a:xfrm>
+          <a:prstGeom prst="rect">
+            <a:avLst/>
+          </a:prstGeom>
+          <a:solidFill>
+            <a:srgbClr val="0C2340"/>
+          </a:solidFill>
+          <a:ln>
+            <a:noFill/>
+          </a:ln>
+          <a:effectLst/>
+        </p:spPr>
+        <p:style>
+          <a:lnRef idx="1">
+            <a:schemeClr val="accent1"/>
+          </a:lnRef>
+          <a:fillRef idx="3">
+            <a:schemeClr val="accent1"/>
+          </a:fillRef>
+          <a:effectRef idx="2">
+            <a:schemeClr val="accent1"/>
+          </a:effectRef>
+          <a:fontRef idx="minor">
+            <a:schemeClr val="lt1"/>
+          </a:fontRef>
+        </p:style>
+        <p:txBody>
+          <a:bodyPr rtlCol="0" anchor="ctr"/>
+          <a:lstStyle/>
+          <a:p>
+            <a:pPr algn="ctr"/>
+          </a:p>
+        </p:txBody>
+      </p:sp>
+      <p:sp>
+        <p:nvSpPr>
+          <p:cNvPr id="3" name="TextBox 2"/>
+          <p:cNvSpPr txBox="1"/>
+          <p:nvPr/>
+        </p:nvSpPr>
+        <p:spPr>
+          <a:xfrm>
+            <a:off x="640080" y="0"/>
+            <a:ext cx="9082735" cy="1188720"/>
+          </a:xfrm>
+          <a:prstGeom prst="rect">
+            <a:avLst/>
+          </a:prstGeom>
+          <a:noFill/>
+        </p:spPr>
+        <p:txBody>
+          <a:bodyPr wrap="square" anchor="ctr" lIns="0" rIns="0" tIns="0" bIns="0">
+            <a:spAutoFit/>
+          </a:bodyPr>
+          <a:lstStyle/>
+          <a:p>
+            <a:pPr algn="ctr"/>
+            <a:r>
+              <a:rPr sz="2600" b="1" i="0">
+                <a:solidFill>
+                  <a:srgbClr val="FFFFFF"/>
+                </a:solidFill>
+                <a:latin typeface="Calibri"/>
+              </a:rPr>
+              <a:t>RUTA DE ENTREGABLES DEL CURSO</a:t>
+            </a:r>
+          </a:p>
+        </p:txBody>
+      </p:sp>
+      <p:sp>
+        <p:nvSpPr>
+          <p:cNvPr id="4" name="TextBox 3"/>
+          <p:cNvSpPr txBox="1"/>
+          <p:nvPr/>
+        </p:nvSpPr>
+        <p:spPr>
+          <a:xfrm>
+            <a:off x="640080" y="1280160"/>
+            <a:ext cx="10911535" cy="411480"/>
+          </a:xfrm>
+          <a:prstGeom prst="rect">
+            <a:avLst/>
+          </a:prstGeom>
+          <a:noFill/>
+        </p:spPr>
+        <p:txBody>
+          <a:bodyPr wrap="square" anchor="t" lIns="0" rIns="0" tIns="0" bIns="0">
+            <a:spAutoFit/>
+          </a:bodyPr>
+          <a:lstStyle/>
+          <a:p>
+            <a:pPr algn="ctr"/>
+            <a:r>
+              <a:rPr sz="1500" b="0" i="0">
+                <a:solidFill>
+                  <a:srgbClr val="2B2B2B"/>
+                </a:solidFill>
+                <a:latin typeface="Calibri"/>
+              </a:rPr>
+              <a:t>Sin fechas a propósito: aquí va </a:t>
+            </a:r>
+            <a:r>
+              <a:rPr sz="1500" b="1" i="0">
+                <a:solidFill>
+                  <a:srgbClr val="2B2B2B"/>
+                </a:solidFill>
+                <a:latin typeface="Calibri"/>
+              </a:rPr>
+              <a:t>en qué punto del curso</a:t>
+            </a:r>
+            <a:r>
+              <a:rPr sz="1500" b="0" i="0">
+                <a:solidFill>
+                  <a:srgbClr val="2B2B2B"/>
+                </a:solidFill>
+                <a:latin typeface="Calibri"/>
+              </a:rPr>
+              <a:t> cierra cada ítem · la ventana exacta la fija CDigital</a:t>
+            </a:r>
+          </a:p>
+        </p:txBody>
+      </p:sp>
+      <p:graphicFrame>
+        <p:nvGraphicFramePr>
+          <p:cNvPr id="5" name="Table 4"/>
+          <p:cNvGraphicFramePr>
+            <a:graphicFrameLocks noGrp="1"/>
+          </p:cNvGraphicFramePr>
+          <p:nvPr/>
+        </p:nvGraphicFramePr>
+        <p:xfrm>
+          <a:off x="640080" y="2011679"/>
+          <a:ext cx="10911533" cy="4297680"/>
+        </p:xfrm>
+        <a:graphic>
+          <a:graphicData uri="http://schemas.openxmlformats.org/drawingml/2006/table">
+            <a:tbl>
+              <a:tblPr>
+                <a:tableStyleId>{2D5ABB26-0587-4C30-8999-92F81FD0307C}</a:tableStyleId>
+              </a:tblPr>
+              <a:tblGrid>
+                <a:gridCol w="2659113"/>
+                <a:gridCol w="2659113"/>
+                <a:gridCol w="5593307"/>
+              </a:tblGrid>
+              <a:tr h="477520">
+                <a:tc>
+                  <a:txBody>
+                    <a:bodyPr/>
+                    <a:lstStyle/>
+                    <a:p>
+                      <a:pPr algn="l"/>
+                      <a:r>
+                        <a:rPr sz="1300" b="1" i="0">
+                          <a:solidFill>
+                            <a:srgbClr val="FFFFFF"/>
+                          </a:solidFill>
+                          <a:latin typeface="Calibri"/>
+                        </a:rPr>
+                        <a:t>Cierra en la semana de…</a:t>
+                      </a:r>
+                    </a:p>
+                  </a:txBody>
+                  <a:tcPr anchor="ctr" marL="109728" marR="91440" marT="36576" marB="36576">
+                    <a:solidFill>
+                      <a:srgbClr val="0C2340"/>
+                    </a:solidFill>
+                  </a:tcPr>
+                </a:tc>
+                <a:tc>
+                  <a:txBody>
+                    <a:bodyPr/>
+                    <a:lstStyle/>
+                    <a:p>
+                      <a:pPr algn="l"/>
+                      <a:r>
+                        <a:rPr sz="1300" b="1" i="0">
+                          <a:solidFill>
+                            <a:srgbClr val="FFFFFF"/>
+                          </a:solidFill>
+                          <a:latin typeface="Calibri"/>
+                        </a:rPr>
+                        <a:t>Entregable</a:t>
+                      </a:r>
+                    </a:p>
+                  </a:txBody>
+                  <a:tcPr anchor="ctr" marL="109728" marR="91440" marT="36576" marB="36576">
+                    <a:solidFill>
+                      <a:srgbClr val="0C2340"/>
+                    </a:solidFill>
+                  </a:tcPr>
+                </a:tc>
+                <a:tc>
+                  <a:txBody>
+                    <a:bodyPr/>
+                    <a:lstStyle/>
+                    <a:p>
+                      <a:pPr algn="l"/>
+                      <a:r>
+                        <a:rPr sz="1300" b="1" i="0">
+                          <a:solidFill>
+                            <a:srgbClr val="FFFFFF"/>
+                          </a:solidFill>
+                          <a:latin typeface="Calibri"/>
+                        </a:rPr>
+                        <a:t>Qué debes tener listo</a:t>
+                      </a:r>
+                    </a:p>
+                  </a:txBody>
+                  <a:tcPr anchor="ctr" marL="109728" marR="91440" marT="36576" marB="36576">
+                    <a:solidFill>
+                      <a:srgbClr val="0C2340"/>
+                    </a:solidFill>
+                  </a:tcPr>
+                </a:tc>
+              </a:tr>
+              <a:tr h="477520">
+                <a:tc>
+                  <a:txBody>
+                    <a:bodyPr/>
+                    <a:lstStyle/>
+                    <a:p>
+                      <a:pPr algn="l"/>
+                      <a:r>
+                        <a:rPr sz="1100" b="1" i="0">
+                          <a:solidFill>
+                            <a:srgbClr val="2B2B2B"/>
+                          </a:solidFill>
+                          <a:latin typeface="Calibri"/>
+                        </a:rPr>
+                        <a:t>Sesión 02</a:t>
+                      </a:r>
+                      <a:r>
+                        <a:rPr sz="1100" b="0" i="0">
+                          <a:solidFill>
+                            <a:srgbClr val="2B2B2B"/>
+                          </a:solidFill>
+                          <a:latin typeface="Calibri"/>
+                        </a:rPr>
+                        <a:t> · ya cerró</a:t>
+                      </a:r>
+                    </a:p>
+                  </a:txBody>
+                  <a:tcPr anchor="ctr" marL="109728" marR="91440" marT="36576" marB="36576">
+                    <a:solidFill>
+                      <a:srgbClr val="FFFFFF"/>
+                    </a:solidFill>
+                  </a:tcPr>
+                </a:tc>
+                <a:tc>
+                  <a:txBody>
+                    <a:bodyPr/>
+                    <a:lstStyle/>
+                    <a:p>
+                      <a:pPr algn="l"/>
+                      <a:r>
+                        <a:rPr sz="1100" b="1" i="0">
+                          <a:solidFill>
+                            <a:srgbClr val="2B2B2B"/>
+                          </a:solidFill>
+                          <a:latin typeface="Calibri"/>
+                        </a:rPr>
+                        <a:t>Quiz 1</a:t>
+                      </a:r>
+                      <a:r>
+                        <a:rPr sz="1100" b="0" i="0">
+                          <a:solidFill>
+                            <a:srgbClr val="2B2B2B"/>
+                          </a:solidFill>
+                          <a:latin typeface="Calibri"/>
+                        </a:rPr>
+                        <a:t> · Cuestionario · 6%</a:t>
+                      </a:r>
+                    </a:p>
+                  </a:txBody>
+                  <a:tcPr anchor="ctr" marL="109728" marR="91440" marT="36576" marB="36576">
+                    <a:solidFill>
+                      <a:srgbClr val="FFFFFF"/>
+                    </a:solidFill>
+                  </a:tcPr>
+                </a:tc>
+                <a:tc>
+                  <a:txBody>
+                    <a:bodyPr/>
+                    <a:lstStyle/>
+                    <a:p>
+                      <a:pPr algn="l"/>
+                      <a:r>
+                        <a:rPr sz="1100" b="0" i="0">
+                          <a:solidFill>
+                            <a:srgbClr val="2B2B2B"/>
+                          </a:solidFill>
+                          <a:latin typeface="Calibri"/>
+                        </a:rPr>
+                        <a:t>Ten leída la unidad del encuadre: </a:t>
+                      </a:r>
+                      <a:r>
+                        <a:rPr sz="1100" b="1" i="0">
+                          <a:solidFill>
+                            <a:srgbClr val="2B2B2B"/>
+                          </a:solidFill>
+                          <a:latin typeface="Calibri"/>
+                        </a:rPr>
+                        <a:t>Propuesta de Innovación</a:t>
+                      </a:r>
+                      <a:r>
+                        <a:rPr sz="1100" b="0" i="0">
+                          <a:solidFill>
+                            <a:srgbClr val="2B2B2B"/>
+                          </a:solidFill>
+                          <a:latin typeface="Calibri"/>
+                        </a:rPr>
+                        <a:t> e inteligencia emocional.</a:t>
+                      </a:r>
+                    </a:p>
+                  </a:txBody>
+                  <a:tcPr anchor="ctr" marL="109728" marR="91440" marT="36576" marB="36576">
+                    <a:solidFill>
+                      <a:srgbClr val="FFFFFF"/>
+                    </a:solidFill>
+                  </a:tcPr>
+                </a:tc>
+              </a:tr>
+              <a:tr h="477520">
+                <a:tc>
+                  <a:txBody>
+                    <a:bodyPr/>
+                    <a:lstStyle/>
+                    <a:p>
+                      <a:pPr algn="l"/>
+                      <a:r>
+                        <a:rPr sz="1100" b="1" i="0">
+                          <a:solidFill>
+                            <a:srgbClr val="2B2B2B"/>
+                          </a:solidFill>
+                          <a:latin typeface="Calibri"/>
+                        </a:rPr>
+                        <a:t>Sesión 03</a:t>
+                      </a:r>
+                      <a:r>
+                        <a:rPr sz="1100" b="0" i="0">
+                          <a:solidFill>
+                            <a:srgbClr val="2B2B2B"/>
+                          </a:solidFill>
+                          <a:latin typeface="Calibri"/>
+                        </a:rPr>
+                        <a:t> · ya cerró</a:t>
+                      </a:r>
+                    </a:p>
+                  </a:txBody>
+                  <a:tcPr anchor="ctr" marL="109728" marR="91440" marT="36576" marB="36576">
+                    <a:solidFill>
+                      <a:srgbClr val="F2F2F2"/>
+                    </a:solidFill>
+                  </a:tcPr>
+                </a:tc>
+                <a:tc>
+                  <a:txBody>
+                    <a:bodyPr/>
+                    <a:lstStyle/>
+                    <a:p>
+                      <a:pPr algn="l"/>
+                      <a:r>
+                        <a:rPr sz="1100" b="1" i="0">
+                          <a:solidFill>
+                            <a:srgbClr val="2B2B2B"/>
+                          </a:solidFill>
+                          <a:latin typeface="Calibri"/>
+                        </a:rPr>
+                        <a:t>Parcial 1</a:t>
+                      </a:r>
+                      <a:r>
+                        <a:rPr sz="1100" b="0" i="0">
+                          <a:solidFill>
+                            <a:srgbClr val="2B2B2B"/>
+                          </a:solidFill>
+                          <a:latin typeface="Calibri"/>
+                        </a:rPr>
+                        <a:t> · Cuestionario · 24%</a:t>
+                      </a:r>
+                    </a:p>
+                  </a:txBody>
+                  <a:tcPr anchor="ctr" marL="109728" marR="91440" marT="36576" marB="36576">
+                    <a:solidFill>
+                      <a:srgbClr val="F2F2F2"/>
+                    </a:solidFill>
+                  </a:tcPr>
+                </a:tc>
+                <a:tc>
+                  <a:txBody>
+                    <a:bodyPr/>
+                    <a:lstStyle/>
+                    <a:p>
+                      <a:pPr algn="l"/>
+                      <a:r>
+                        <a:rPr sz="1100" b="0" i="0">
+                          <a:solidFill>
+                            <a:srgbClr val="2B2B2B"/>
+                          </a:solidFill>
+                          <a:latin typeface="Calibri"/>
+                        </a:rPr>
+                        <a:t>Domina </a:t>
+                      </a:r>
+                      <a:r>
+                        <a:rPr sz="1100" b="1" i="0">
+                          <a:solidFill>
+                            <a:srgbClr val="2B2B2B"/>
+                          </a:solidFill>
+                          <a:latin typeface="Calibri"/>
+                        </a:rPr>
+                        <a:t>Design Thinking</a:t>
+                      </a:r>
+                      <a:r>
+                        <a:rPr sz="1100" b="0" i="0">
+                          <a:solidFill>
+                            <a:srgbClr val="2B2B2B"/>
+                          </a:solidFill>
+                          <a:latin typeface="Calibri"/>
+                        </a:rPr>
+                        <a:t>, dos técnicas de ideación, bloqueadores y ensanchadores.</a:t>
+                      </a:r>
+                    </a:p>
+                  </a:txBody>
+                  <a:tcPr anchor="ctr" marL="109728" marR="91440" marT="36576" marB="36576">
+                    <a:solidFill>
+                      <a:srgbClr val="F2F2F2"/>
+                    </a:solidFill>
+                  </a:tcPr>
+                </a:tc>
+              </a:tr>
+              <a:tr h="477520">
+                <a:tc>
+                  <a:txBody>
+                    <a:bodyPr/>
+                    <a:lstStyle/>
+                    <a:p>
+                      <a:pPr algn="l"/>
+                      <a:r>
+                        <a:rPr sz="1100" b="1" i="0">
+                          <a:solidFill>
+                            <a:srgbClr val="2B2B2B"/>
+                          </a:solidFill>
+                          <a:latin typeface="Calibri"/>
+                        </a:rPr>
+                        <a:t>Sesión 04</a:t>
+                      </a:r>
+                      <a:r>
+                        <a:rPr sz="1100" b="0" i="0">
+                          <a:solidFill>
+                            <a:srgbClr val="2B2B2B"/>
+                          </a:solidFill>
+                          <a:latin typeface="Calibri"/>
+                        </a:rPr>
+                        <a:t> · cierra esta semana</a:t>
+                      </a:r>
+                    </a:p>
+                  </a:txBody>
+                  <a:tcPr anchor="ctr" marL="109728" marR="91440" marT="36576" marB="36576">
+                    <a:solidFill>
+                      <a:srgbClr val="FFFFFF"/>
+                    </a:solidFill>
+                  </a:tcPr>
+                </a:tc>
+                <a:tc>
+                  <a:txBody>
+                    <a:bodyPr/>
+                    <a:lstStyle/>
+                    <a:p>
+                      <a:pPr algn="l"/>
+                      <a:r>
+                        <a:rPr sz="1100" b="1" i="0">
+                          <a:solidFill>
+                            <a:srgbClr val="2B2B2B"/>
+                          </a:solidFill>
+                          <a:latin typeface="Calibri"/>
+                        </a:rPr>
+                        <a:t>Quiz 2</a:t>
+                      </a:r>
+                      <a:r>
+                        <a:rPr sz="1100" b="0" i="0">
+                          <a:solidFill>
+                            <a:srgbClr val="2B2B2B"/>
+                          </a:solidFill>
+                          <a:latin typeface="Calibri"/>
+                        </a:rPr>
+                        <a:t> · Cuestionario · 9%</a:t>
+                      </a:r>
+                    </a:p>
+                  </a:txBody>
+                  <a:tcPr anchor="ctr" marL="109728" marR="91440" marT="36576" marB="36576">
+                    <a:solidFill>
+                      <a:srgbClr val="FFFFFF"/>
+                    </a:solidFill>
+                  </a:tcPr>
+                </a:tc>
+                <a:tc>
+                  <a:txBody>
+                    <a:bodyPr/>
+                    <a:lstStyle/>
+                    <a:p>
+                      <a:pPr algn="l"/>
+                      <a:r>
+                        <a:rPr sz="1100" b="0" i="0">
+                          <a:solidFill>
+                            <a:srgbClr val="2B2B2B"/>
+                          </a:solidFill>
+                          <a:latin typeface="Calibri"/>
+                        </a:rPr>
+                        <a:t>Suma el </a:t>
+                      </a:r>
+                      <a:r>
+                        <a:rPr sz="1100" b="1" i="0">
+                          <a:solidFill>
+                            <a:srgbClr val="2B2B2B"/>
+                          </a:solidFill>
+                          <a:latin typeface="Calibri"/>
+                        </a:rPr>
+                        <a:t>Manual de Oslo</a:t>
+                      </a:r>
+                      <a:r>
+                        <a:rPr sz="1100" b="0" i="0">
+                          <a:solidFill>
+                            <a:srgbClr val="2B2B2B"/>
+                          </a:solidFill>
+                          <a:latin typeface="Calibri"/>
+                        </a:rPr>
+                        <a:t>: qué cuenta como innovación y cómo se gestiona; el curso acumula.</a:t>
+                      </a:r>
+                    </a:p>
+                  </a:txBody>
+                  <a:tcPr anchor="ctr" marL="109728" marR="91440" marT="36576" marB="36576">
+                    <a:solidFill>
+                      <a:srgbClr val="FFFFFF"/>
+                    </a:solidFill>
+                  </a:tcPr>
+                </a:tc>
+              </a:tr>
+              <a:tr h="477520">
+                <a:tc>
+                  <a:txBody>
+                    <a:bodyPr/>
+                    <a:lstStyle/>
+                    <a:p>
+                      <a:pPr algn="l"/>
+                      <a:r>
+                        <a:rPr sz="1100" b="1" i="0">
+                          <a:solidFill>
+                            <a:srgbClr val="2B2B2B"/>
+                          </a:solidFill>
+                          <a:latin typeface="Calibri"/>
+                        </a:rPr>
+                        <a:t>Sesión 05</a:t>
+                      </a:r>
+                      <a:r>
+                        <a:rPr sz="1100" b="0" i="0">
+                          <a:solidFill>
+                            <a:srgbClr val="2B2B2B"/>
+                          </a:solidFill>
+                          <a:latin typeface="Calibri"/>
+                        </a:rPr>
+                        <a:t> · pendiente</a:t>
+                      </a:r>
+                    </a:p>
+                  </a:txBody>
+                  <a:tcPr anchor="ctr" marL="109728" marR="91440" marT="36576" marB="36576">
+                    <a:solidFill>
+                      <a:srgbClr val="F2F2F2"/>
+                    </a:solidFill>
+                  </a:tcPr>
+                </a:tc>
+                <a:tc>
+                  <a:txBody>
+                    <a:bodyPr/>
+                    <a:lstStyle/>
+                    <a:p>
+                      <a:pPr algn="l"/>
+                      <a:r>
+                        <a:rPr sz="1100" b="1" i="0">
+                          <a:solidFill>
+                            <a:srgbClr val="2B2B2B"/>
+                          </a:solidFill>
+                          <a:latin typeface="Calibri"/>
+                        </a:rPr>
+                        <a:t>Parcial 2</a:t>
+                      </a:r>
+                      <a:r>
+                        <a:rPr sz="1100" b="0" i="0">
+                          <a:solidFill>
+                            <a:srgbClr val="2B2B2B"/>
+                          </a:solidFill>
+                          <a:latin typeface="Calibri"/>
+                        </a:rPr>
+                        <a:t> · Cuestionario · 21%</a:t>
+                      </a:r>
+                    </a:p>
+                  </a:txBody>
+                  <a:tcPr anchor="ctr" marL="109728" marR="91440" marT="36576" marB="36576">
+                    <a:solidFill>
+                      <a:srgbClr val="F2F2F2"/>
+                    </a:solidFill>
+                  </a:tcPr>
+                </a:tc>
+                <a:tc>
+                  <a:txBody>
+                    <a:bodyPr/>
+                    <a:lstStyle/>
+                    <a:p>
+                      <a:pPr algn="l"/>
+                      <a:r>
+                        <a:rPr sz="1100" b="0" i="0">
+                          <a:solidFill>
+                            <a:srgbClr val="2B2B2B"/>
+                          </a:solidFill>
+                          <a:latin typeface="Calibri"/>
+                        </a:rPr>
+                        <a:t>Tipifica tu innovación (producto, proceso, organización, marketing, social) y </a:t>
+                      </a:r>
+                      <a:r>
+                        <a:rPr sz="1100" b="1" i="0">
+                          <a:solidFill>
+                            <a:srgbClr val="2B2B2B"/>
+                          </a:solidFill>
+                          <a:latin typeface="Calibri"/>
+                        </a:rPr>
+                        <a:t>justifícala</a:t>
+                      </a:r>
+                      <a:r>
+                        <a:rPr sz="1100" b="0" i="0">
+                          <a:solidFill>
+                            <a:srgbClr val="2B2B2B"/>
+                          </a:solidFill>
+                          <a:latin typeface="Calibri"/>
+                        </a:rPr>
+                        <a:t>.</a:t>
+                      </a:r>
+                    </a:p>
+                  </a:txBody>
+                  <a:tcPr anchor="ctr" marL="109728" marR="91440" marT="36576" marB="36576">
+                    <a:solidFill>
+                      <a:srgbClr val="F2F2F2"/>
+                    </a:solidFill>
+                  </a:tcPr>
+                </a:tc>
+              </a:tr>
+              <a:tr h="477520">
+                <a:tc>
+                  <a:txBody>
+                    <a:bodyPr/>
+                    <a:lstStyle/>
+                    <a:p>
+                      <a:pPr algn="l"/>
+                      <a:r>
+                        <a:rPr sz="1100" b="1" i="0">
+                          <a:solidFill>
+                            <a:srgbClr val="2B2B2B"/>
+                          </a:solidFill>
+                          <a:latin typeface="Calibri"/>
+                        </a:rPr>
+                        <a:t>Sesión 06</a:t>
+                      </a:r>
+                      <a:r>
+                        <a:rPr sz="1100" b="0" i="0">
+                          <a:solidFill>
+                            <a:srgbClr val="2B2B2B"/>
+                          </a:solidFill>
+                          <a:latin typeface="Calibri"/>
+                        </a:rPr>
+                        <a:t> · pendiente</a:t>
+                      </a:r>
+                    </a:p>
+                  </a:txBody>
+                  <a:tcPr anchor="ctr" marL="109728" marR="91440" marT="36576" marB="36576">
+                    <a:solidFill>
+                      <a:srgbClr val="FFFFFF"/>
+                    </a:solidFill>
+                  </a:tcPr>
+                </a:tc>
+                <a:tc>
+                  <a:txBody>
+                    <a:bodyPr/>
+                    <a:lstStyle/>
+                    <a:p>
+                      <a:pPr algn="l"/>
+                      <a:r>
+                        <a:rPr sz="1100" b="1" i="0">
+                          <a:solidFill>
+                            <a:srgbClr val="2B2B2B"/>
+                          </a:solidFill>
+                          <a:latin typeface="Calibri"/>
+                        </a:rPr>
+                        <a:t>ACA Final</a:t>
+                      </a:r>
+                      <a:r>
+                        <a:rPr sz="1100" b="0" i="0">
+                          <a:solidFill>
+                            <a:srgbClr val="2B2B2B"/>
+                          </a:solidFill>
+                          <a:latin typeface="Calibri"/>
+                        </a:rPr>
+                        <a:t> · Tarea · 32,8%</a:t>
+                      </a:r>
+                    </a:p>
+                  </a:txBody>
+                  <a:tcPr anchor="ctr" marL="109728" marR="91440" marT="36576" marB="36576">
+                    <a:solidFill>
+                      <a:srgbClr val="FFFFFF"/>
+                    </a:solidFill>
+                  </a:tcPr>
+                </a:tc>
+                <a:tc>
+                  <a:txBody>
+                    <a:bodyPr/>
+                    <a:lstStyle/>
+                    <a:p>
+                      <a:pPr algn="l"/>
+                      <a:r>
+                        <a:rPr sz="1100" b="0" i="0">
+                          <a:solidFill>
+                            <a:srgbClr val="2B2B2B"/>
+                          </a:solidFill>
+                          <a:latin typeface="Calibri"/>
+                        </a:rPr>
+                        <a:t>Sube la </a:t>
+                      </a:r>
+                      <a:r>
+                        <a:rPr sz="1100" b="1" i="0">
+                          <a:solidFill>
+                            <a:srgbClr val="2B2B2B"/>
+                          </a:solidFill>
+                          <a:latin typeface="Calibri"/>
+                        </a:rPr>
+                        <a:t>propuesta consolidada</a:t>
+                      </a:r>
+                      <a:r>
+                        <a:rPr sz="1100" b="0" i="0">
+                          <a:solidFill>
+                            <a:srgbClr val="2B2B2B"/>
+                          </a:solidFill>
+                          <a:latin typeface="Calibri"/>
+                        </a:rPr>
+                        <a:t>: problema, tipo Oslo, FODA, Canvas, MVP, vigilancia y pitch.</a:t>
+                      </a:r>
+                    </a:p>
+                  </a:txBody>
+                  <a:tcPr anchor="ctr" marL="109728" marR="91440" marT="36576" marB="36576">
+                    <a:solidFill>
+                      <a:srgbClr val="FFFFFF"/>
+                    </a:solidFill>
+                  </a:tcPr>
+                </a:tc>
+              </a:tr>
+              <a:tr h="477520">
+                <a:tc>
+                  <a:txBody>
+                    <a:bodyPr/>
+                    <a:lstStyle/>
+                    <a:p>
+                      <a:pPr algn="l"/>
+                      <a:r>
+                        <a:rPr sz="1100" b="1" i="0">
+                          <a:solidFill>
+                            <a:srgbClr val="2B2B2B"/>
+                          </a:solidFill>
+                          <a:latin typeface="Calibri"/>
+                        </a:rPr>
+                        <a:t>Sesión 06</a:t>
+                      </a:r>
+                      <a:r>
+                        <a:rPr sz="1100" b="0" i="0">
+                          <a:solidFill>
+                            <a:srgbClr val="2B2B2B"/>
+                          </a:solidFill>
+                          <a:latin typeface="Calibri"/>
+                        </a:rPr>
+                        <a:t> · pendiente</a:t>
+                      </a:r>
+                    </a:p>
+                  </a:txBody>
+                  <a:tcPr anchor="ctr" marL="109728" marR="91440" marT="36576" marB="36576">
+                    <a:solidFill>
+                      <a:srgbClr val="F2F2F2"/>
+                    </a:solidFill>
+                  </a:tcPr>
+                </a:tc>
+                <a:tc>
+                  <a:txBody>
+                    <a:bodyPr/>
+                    <a:lstStyle/>
+                    <a:p>
+                      <a:pPr algn="l"/>
+                      <a:r>
+                        <a:rPr sz="1100" b="1" i="0">
+                          <a:solidFill>
+                            <a:srgbClr val="2B2B2B"/>
+                          </a:solidFill>
+                          <a:latin typeface="Calibri"/>
+                        </a:rPr>
+                        <a:t>Quiz 3</a:t>
+                      </a:r>
+                      <a:r>
+                        <a:rPr sz="1100" b="0" i="0">
+                          <a:solidFill>
+                            <a:srgbClr val="2B2B2B"/>
+                          </a:solidFill>
+                          <a:latin typeface="Calibri"/>
+                        </a:rPr>
+                        <a:t> · Cuestionario · 4%</a:t>
+                      </a:r>
+                    </a:p>
+                  </a:txBody>
+                  <a:tcPr anchor="ctr" marL="109728" marR="91440" marT="36576" marB="36576">
+                    <a:solidFill>
+                      <a:srgbClr val="F2F2F2"/>
+                    </a:solidFill>
+                  </a:tcPr>
+                </a:tc>
+                <a:tc>
+                  <a:txBody>
+                    <a:bodyPr/>
+                    <a:lstStyle/>
+                    <a:p>
+                      <a:pPr algn="l"/>
+                      <a:r>
+                        <a:rPr sz="1100" b="0" i="0">
+                          <a:solidFill>
+                            <a:srgbClr val="2B2B2B"/>
+                          </a:solidFill>
+                          <a:latin typeface="Calibri"/>
+                        </a:rPr>
+                        <a:t>Ten claros </a:t>
+                      </a:r>
+                      <a:r>
+                        <a:rPr sz="1100" b="1" i="0">
+                          <a:solidFill>
+                            <a:srgbClr val="2B2B2B"/>
+                          </a:solidFill>
+                          <a:latin typeface="Calibri"/>
+                        </a:rPr>
+                        <a:t>FODA, Canvas y MVP</a:t>
+                      </a:r>
+                      <a:r>
+                        <a:rPr sz="1100" b="0" i="0">
+                          <a:solidFill>
+                            <a:srgbClr val="2B2B2B"/>
+                          </a:solidFill>
+                          <a:latin typeface="Calibri"/>
+                        </a:rPr>
+                        <a:t> (verificable) y para qué sirve la vigilancia tecnológica.</a:t>
+                      </a:r>
+                    </a:p>
+                  </a:txBody>
+                  <a:tcPr anchor="ctr" marL="109728" marR="91440" marT="36576" marB="36576">
+                    <a:solidFill>
+                      <a:srgbClr val="F2F2F2"/>
+                    </a:solidFill>
+                  </a:tcPr>
+                </a:tc>
+              </a:tr>
+              <a:tr h="477520">
+                <a:tc>
+                  <a:txBody>
+                    <a:bodyPr/>
+                    <a:lstStyle/>
+                    <a:p>
+                      <a:pPr algn="l"/>
+                      <a:r>
+                        <a:rPr sz="1100" b="1" i="0">
+                          <a:solidFill>
+                            <a:srgbClr val="2B2B2B"/>
+                          </a:solidFill>
+                          <a:latin typeface="Calibri"/>
+                        </a:rPr>
+                        <a:t>Sesión 07</a:t>
+                      </a:r>
+                      <a:r>
+                        <a:rPr sz="1100" b="0" i="0">
+                          <a:solidFill>
+                            <a:srgbClr val="2B2B2B"/>
+                          </a:solidFill>
+                          <a:latin typeface="Calibri"/>
+                        </a:rPr>
+                        <a:t> · pendiente</a:t>
+                      </a:r>
+                    </a:p>
+                  </a:txBody>
+                  <a:tcPr anchor="ctr" marL="109728" marR="91440" marT="36576" marB="36576">
+                    <a:solidFill>
+                      <a:srgbClr val="FFFFFF"/>
+                    </a:solidFill>
+                  </a:tcPr>
+                </a:tc>
+                <a:tc>
+                  <a:txBody>
+                    <a:bodyPr/>
+                    <a:lstStyle/>
+                    <a:p>
+                      <a:pPr algn="l"/>
+                      <a:r>
+                        <a:rPr sz="1100" b="1" i="0">
+                          <a:solidFill>
+                            <a:srgbClr val="2B2B2B"/>
+                          </a:solidFill>
+                          <a:latin typeface="Calibri"/>
+                        </a:rPr>
+                        <a:t>Autoevaluación</a:t>
+                      </a:r>
+                      <a:r>
+                        <a:rPr sz="1100" b="0" i="0">
+                          <a:solidFill>
+                            <a:srgbClr val="2B2B2B"/>
+                          </a:solidFill>
+                          <a:latin typeface="Calibri"/>
+                        </a:rPr>
+                        <a:t> · Cuestionario · 1,6%</a:t>
+                      </a:r>
+                    </a:p>
+                  </a:txBody>
+                  <a:tcPr anchor="ctr" marL="109728" marR="91440" marT="36576" marB="36576">
+                    <a:solidFill>
+                      <a:srgbClr val="FFFFFF"/>
+                    </a:solidFill>
+                  </a:tcPr>
+                </a:tc>
+                <a:tc>
+                  <a:txBody>
+                    <a:bodyPr/>
+                    <a:lstStyle/>
+                    <a:p>
+                      <a:pPr algn="l"/>
+                      <a:r>
+                        <a:rPr sz="1100" b="0" i="0">
+                          <a:solidFill>
+                            <a:srgbClr val="2B2B2B"/>
+                          </a:solidFill>
+                          <a:latin typeface="Calibri"/>
+                        </a:rPr>
+                        <a:t>Diligénciala tú, y solo tú, </a:t>
+                      </a:r>
+                      <a:r>
+                        <a:rPr sz="1100" b="1" i="0">
+                          <a:solidFill>
+                            <a:srgbClr val="2B2B2B"/>
+                          </a:solidFill>
+                          <a:latin typeface="Calibri"/>
+                        </a:rPr>
+                        <a:t>con honestidad</a:t>
+                      </a:r>
+                      <a:r>
+                        <a:rPr sz="1100" b="0" i="0">
+                          <a:solidFill>
+                            <a:srgbClr val="2B2B2B"/>
+                          </a:solidFill>
+                          <a:latin typeface="Calibri"/>
+                        </a:rPr>
+                        <a:t> sobre tu participación real.</a:t>
+                      </a:r>
+                    </a:p>
+                  </a:txBody>
+                  <a:tcPr anchor="ctr" marL="109728" marR="91440" marT="36576" marB="36576">
+                    <a:solidFill>
+                      <a:srgbClr val="FFFFFF"/>
+                    </a:solidFill>
+                  </a:tcPr>
+                </a:tc>
+              </a:tr>
+              <a:tr h="477520">
+                <a:tc>
+                  <a:txBody>
+                    <a:bodyPr/>
+                    <a:lstStyle/>
+                    <a:p>
+                      <a:pPr algn="l"/>
+                      <a:r>
+                        <a:rPr sz="1100" b="1" i="0">
+                          <a:solidFill>
+                            <a:srgbClr val="2B2B2B"/>
+                          </a:solidFill>
+                          <a:latin typeface="Calibri"/>
+                        </a:rPr>
+                        <a:t>Sesión 07</a:t>
+                      </a:r>
+                      <a:r>
+                        <a:rPr sz="1100" b="0" i="0">
+                          <a:solidFill>
+                            <a:srgbClr val="2B2B2B"/>
+                          </a:solidFill>
+                          <a:latin typeface="Calibri"/>
+                        </a:rPr>
+                        <a:t> · pendiente</a:t>
+                      </a:r>
+                    </a:p>
+                  </a:txBody>
+                  <a:tcPr anchor="ctr" marL="109728" marR="91440" marT="36576" marB="36576">
+                    <a:solidFill>
+                      <a:srgbClr val="F2F2F2"/>
+                    </a:solidFill>
+                  </a:tcPr>
+                </a:tc>
+                <a:tc>
+                  <a:txBody>
+                    <a:bodyPr/>
+                    <a:lstStyle/>
+                    <a:p>
+                      <a:pPr algn="l"/>
+                      <a:r>
+                        <a:rPr sz="1100" b="1" i="0">
+                          <a:solidFill>
+                            <a:srgbClr val="2B2B2B"/>
+                          </a:solidFill>
+                          <a:latin typeface="Calibri"/>
+                        </a:rPr>
+                        <a:t>Coevaluación</a:t>
+                      </a:r>
+                      <a:r>
+                        <a:rPr sz="1100" b="0" i="0">
+                          <a:solidFill>
+                            <a:srgbClr val="2B2B2B"/>
+                          </a:solidFill>
+                          <a:latin typeface="Calibri"/>
+                        </a:rPr>
+                        <a:t> · Foro · 1,6%</a:t>
+                      </a:r>
+                    </a:p>
+                  </a:txBody>
+                  <a:tcPr anchor="ctr" marL="109728" marR="91440" marT="36576" marB="36576">
+                    <a:solidFill>
+                      <a:srgbClr val="F2F2F2"/>
+                    </a:solidFill>
+                  </a:tcPr>
+                </a:tc>
+                <a:tc>
+                  <a:txBody>
+                    <a:bodyPr/>
+                    <a:lstStyle/>
+                    <a:p>
+                      <a:pPr algn="l"/>
+                      <a:r>
+                        <a:rPr sz="1100" b="1" i="0">
+                          <a:solidFill>
+                            <a:srgbClr val="2B2B2B"/>
+                          </a:solidFill>
+                          <a:latin typeface="Calibri"/>
+                        </a:rPr>
+                        <a:t>Publica</a:t>
+                      </a:r>
+                      <a:r>
+                        <a:rPr sz="1100" b="0" i="0">
+                          <a:solidFill>
+                            <a:srgbClr val="2B2B2B"/>
+                          </a:solidFill>
+                          <a:latin typeface="Calibri"/>
+                        </a:rPr>
+                        <a:t> tu aporte: valora hechos del trabajo en equipo, no a las personas.</a:t>
+                      </a:r>
+                    </a:p>
+                  </a:txBody>
+                  <a:tcPr anchor="ctr" marL="109728" marR="91440" marT="36576" marB="36576">
+                    <a:solidFill>
+                      <a:srgbClr val="F2F2F2"/>
+                    </a:solidFill>
+                  </a:tcPr>
+                </a:tc>
+              </a:tr>
+            </a:tbl>
+          </a:graphicData>
+        </a:graphic>
+      </p:graphicFrame>
+      <p:sp>
+        <p:nvSpPr>
+          <p:cNvPr id="6" name="TextBox 5"/>
+          <p:cNvSpPr txBox="1"/>
+          <p:nvPr/>
+        </p:nvSpPr>
+        <p:spPr>
+          <a:xfrm>
+            <a:off x="640080" y="6080760"/>
+            <a:ext cx="10911535" cy="548640"/>
+          </a:xfrm>
+          <a:prstGeom prst="rect">
+            <a:avLst/>
+          </a:prstGeom>
+          <a:noFill/>
+        </p:spPr>
+        <p:txBody>
+          <a:bodyPr wrap="square" anchor="t" lIns="0" rIns="0" tIns="0" bIns="0">
+            <a:spAutoFit/>
+          </a:bodyPr>
+          <a:lstStyle/>
+          <a:p>
+            <a:r>
+              <a:rPr sz="1200" b="0" i="1">
+                <a:solidFill>
+                  <a:srgbClr val="2B2B2B"/>
+                </a:solidFill>
+                <a:latin typeface="Calibri"/>
+              </a:rPr>
+              <a:t>Esta misma tabla va al final de todas las sesiones. La </a:t>
+            </a:r>
+            <a:r>
+              <a:rPr sz="1200" b="1" i="1">
+                <a:solidFill>
+                  <a:srgbClr val="2B2B2B"/>
+                </a:solidFill>
+                <a:latin typeface="Calibri"/>
+              </a:rPr>
+              <a:t>fecha</a:t>
+            </a:r>
+            <a:r>
+              <a:rPr sz="1200" b="0" i="1">
+                <a:solidFill>
+                  <a:srgbClr val="2B2B2B"/>
+                </a:solidFill>
+                <a:latin typeface="Calibri"/>
+              </a:rPr>
+              <a:t> de cada ventana está en el enunciado del ítem (`Clases/Recursos/ACAs/`) y en el aula: si el aula y cualquier otro material se contradicen, </a:t>
+            </a:r>
+            <a:r>
+              <a:rPr sz="1200" b="1" i="1">
+                <a:solidFill>
+                  <a:srgbClr val="2B2B2B"/>
+                </a:solidFill>
+                <a:latin typeface="Calibri"/>
+              </a:rPr>
+              <a:t>manda el aula</a:t>
+            </a:r>
+            <a:r>
+              <a:rPr sz="1200" b="0" i="1">
+                <a:solidFill>
+                  <a:srgbClr val="2B2B2B"/>
+                </a:solidFill>
+                <a:latin typeface="Calibri"/>
+              </a:rPr>
+              <a:t>.</a:t>
+            </a:r>
+          </a:p>
+        </p:txBody>
+      </p:sp>
+      <p:sp>
+        <p:nvSpPr>
+          <p:cNvPr id="7" name="TextBox 6"/>
+          <p:cNvSpPr txBox="1"/>
+          <p:nvPr/>
+        </p:nvSpPr>
+        <p:spPr>
+          <a:xfrm>
+            <a:off x="11094415" y="6446520"/>
+            <a:ext cx="548640" cy="274320"/>
+          </a:xfrm>
+          <a:prstGeom prst="rect">
+            <a:avLst/>
+          </a:prstGeom>
+          <a:noFill/>
+        </p:spPr>
+        <p:txBody>
+          <a:bodyPr wrap="square" anchor="t" lIns="0" rIns="0" tIns="0" bIns="0">
+            <a:spAutoFit/>
+          </a:bodyPr>
+          <a:lstStyle/>
+          <a:p>
+            <a:pPr algn="r"/>
+            <a:r>
+              <a:rPr sz="1000" b="1" i="0">
+                <a:solidFill>
+                  <a:srgbClr val="8F989D"/>
+                </a:solidFill>
+                <a:latin typeface="Calibri"/>
+              </a:rPr>
+              <a:t>20</a:t>
+            </a:r>
+          </a:p>
+        </p:txBody>
+      </p:sp>
+    </p:spTree>
+  </p:cSld>
+  <p:clrMapOvr>
+    <a:masterClrMapping/>
+  </p:clrMapOvr>
+</p:sld>
+</file>
+
+<file path=ppt/slides/slide21.xml><?xml version="1.0" encoding="utf-8"?>
 <p:sld xmlns:a="http://schemas.openxmlformats.org/drawingml/2006/main" xmlns:p="http://schemas.openxmlformats.org/presentationml/2006/main" xmlns:r="http://schemas.openxmlformats.org/officeDocument/2006/relationships">
   <p:cSld>
     <p:bg>
@@ -8501,405 +10603,6 @@
                 <a:latin typeface="Calibri"/>
               </a:rPr>
               <a:t>CREATIVIDAD Y PENSAMIENTO INNOVADOR</a:t>
-            </a:r>
-          </a:p>
-        </p:txBody>
-      </p:sp>
-    </p:spTree>
-  </p:cSld>
-  <p:clrMapOvr>
-    <a:masterClrMapping/>
-  </p:clrMapOvr>
-</p:sld>
-</file>
-
-<file path=ppt/slides/slide2.xml><?xml version="1.0" encoding="utf-8"?>
-<p:sld xmlns:a="http://schemas.openxmlformats.org/drawingml/2006/main" xmlns:p="http://schemas.openxmlformats.org/presentationml/2006/main" xmlns:r="http://schemas.openxmlformats.org/officeDocument/2006/relationships">
-  <p:cSld>
-    <p:bg>
-      <p:bgPr>
-        <a:solidFill>
-          <a:srgbClr val="FFFFFF"/>
-        </a:solidFill>
-        <a:effectLst/>
-      </p:bgPr>
-    </p:bg>
-    <p:spTree>
-      <p:nvGrpSpPr>
-        <p:cNvPr id="1" name=""/>
-        <p:cNvGrpSpPr/>
-        <p:nvPr/>
-      </p:nvGrpSpPr>
-      <p:grpSpPr/>
-      <p:sp>
-        <p:nvSpPr>
-          <p:cNvPr id="2" name="Rectangle 1"/>
-          <p:cNvSpPr/>
-          <p:nvPr/>
-        </p:nvSpPr>
-        <p:spPr>
-          <a:xfrm>
-            <a:off x="0" y="0"/>
-            <a:ext cx="12191695" cy="1188720"/>
-          </a:xfrm>
-          <a:prstGeom prst="rect">
-            <a:avLst/>
-          </a:prstGeom>
-          <a:solidFill>
-            <a:srgbClr val="0C2340"/>
-          </a:solidFill>
-          <a:ln>
-            <a:noFill/>
-          </a:ln>
-          <a:effectLst/>
-        </p:spPr>
-        <p:style>
-          <a:lnRef idx="1">
-            <a:schemeClr val="accent1"/>
-          </a:lnRef>
-          <a:fillRef idx="3">
-            <a:schemeClr val="accent1"/>
-          </a:fillRef>
-          <a:effectRef idx="2">
-            <a:schemeClr val="accent1"/>
-          </a:effectRef>
-          <a:fontRef idx="minor">
-            <a:schemeClr val="lt1"/>
-          </a:fontRef>
-        </p:style>
-        <p:txBody>
-          <a:bodyPr rtlCol="0" anchor="ctr"/>
-          <a:lstStyle/>
-          <a:p>
-            <a:pPr algn="ctr"/>
-          </a:p>
-        </p:txBody>
-      </p:sp>
-      <p:sp>
-        <p:nvSpPr>
-          <p:cNvPr id="3" name="TextBox 2"/>
-          <p:cNvSpPr txBox="1"/>
-          <p:nvPr/>
-        </p:nvSpPr>
-        <p:spPr>
-          <a:xfrm>
-            <a:off x="640080" y="0"/>
-            <a:ext cx="9082735" cy="1188720"/>
-          </a:xfrm>
-          <a:prstGeom prst="rect">
-            <a:avLst/>
-          </a:prstGeom>
-          <a:noFill/>
-        </p:spPr>
-        <p:txBody>
-          <a:bodyPr wrap="square" anchor="ctr" lIns="0" rIns="0" tIns="0" bIns="0">
-            <a:spAutoFit/>
-          </a:bodyPr>
-          <a:lstStyle/>
-          <a:p>
-            <a:pPr algn="ctr"/>
-            <a:r>
-              <a:rPr sz="2600" b="1" i="0">
-                <a:solidFill>
-                  <a:srgbClr val="FFFFFF"/>
-                </a:solidFill>
-                <a:latin typeface="Calibri"/>
-              </a:rPr>
-              <a:t>Una etiqueta no defiende nada</a:t>
-            </a:r>
-          </a:p>
-        </p:txBody>
-      </p:sp>
-      <p:sp>
-        <p:nvSpPr>
-          <p:cNvPr id="4" name="TextBox 3"/>
-          <p:cNvSpPr txBox="1"/>
-          <p:nvPr/>
-        </p:nvSpPr>
-        <p:spPr>
-          <a:xfrm>
-            <a:off x="640080" y="1691639"/>
-            <a:ext cx="10911535" cy="4617720"/>
-          </a:xfrm>
-          <a:prstGeom prst="rect">
-            <a:avLst/>
-          </a:prstGeom>
-          <a:noFill/>
-        </p:spPr>
-        <p:txBody>
-          <a:bodyPr wrap="square" anchor="t" lIns="0" rIns="0" tIns="0" bIns="0">
-            <a:spAutoFit/>
-          </a:bodyPr>
-          <a:lstStyle/>
-          <a:p>
-            <a:pPr>
-              <a:spcAft>
-                <a:spcPts val="1000"/>
-              </a:spcAft>
-            </a:pPr>
-            <a:r>
-              <a:rPr sz="1600" b="0" i="0">
-                <a:solidFill>
-                  <a:srgbClr val="2B2B2B"/>
-                </a:solidFill>
-                <a:latin typeface="Calibri"/>
-              </a:rPr>
-              <a:t>–   La sesión pasada le pusieron una </a:t>
-            </a:r>
-            <a:r>
-              <a:rPr sz="1600" b="1" i="0">
-                <a:solidFill>
-                  <a:srgbClr val="2B2B2B"/>
-                </a:solidFill>
-                <a:latin typeface="Calibri"/>
-              </a:rPr>
-              <a:t>etiqueta</a:t>
-            </a:r>
-            <a:r>
-              <a:rPr sz="1600" b="0" i="0">
-                <a:solidFill>
-                  <a:srgbClr val="2B2B2B"/>
-                </a:solidFill>
-                <a:latin typeface="Calibri"/>
-              </a:rPr>
-              <a:t> Oslo a su propuesta: producto, proceso, organización, marketing o social.</a:t>
-            </a:r>
-          </a:p>
-          <a:p>
-            <a:pPr>
-              <a:spcAft>
-                <a:spcPts val="1000"/>
-              </a:spcAft>
-            </a:pPr>
-            <a:r>
-              <a:rPr sz="1600" b="0" i="0">
-                <a:solidFill>
-                  <a:srgbClr val="2B2B2B"/>
-                </a:solidFill>
-                <a:latin typeface="Calibri"/>
-              </a:rPr>
-              <a:t>–   Hoy sube la exigencia: </a:t>
-            </a:r>
-            <a:r>
-              <a:rPr sz="1600" b="1" i="0">
-                <a:solidFill>
-                  <a:srgbClr val="2B2B2B"/>
-                </a:solidFill>
-                <a:latin typeface="Calibri"/>
-              </a:rPr>
-              <a:t>no basta con la etiqueta, hay que argumentar por qué ESE tipo y no otro</a:t>
-            </a:r>
-            <a:r>
-              <a:rPr sz="1600" b="0" i="0">
-                <a:solidFill>
-                  <a:srgbClr val="2B2B2B"/>
-                </a:solidFill>
-                <a:latin typeface="Calibri"/>
-              </a:rPr>
-              <a:t>.</a:t>
-            </a:r>
-          </a:p>
-          <a:p>
-            <a:pPr>
-              <a:spcAft>
-                <a:spcPts val="1000"/>
-              </a:spcAft>
-            </a:pPr>
-            <a:r>
-              <a:rPr sz="1600" b="0" i="0">
-                <a:solidFill>
-                  <a:srgbClr val="2B2B2B"/>
-                </a:solidFill>
-                <a:latin typeface="Calibri"/>
-              </a:rPr>
-              <a:t>–   La escena que se van a encontrar en la sustentación:</a:t>
-            </a:r>
-          </a:p>
-          <a:p>
-            <a:pPr lvl="1">
-              <a:spcAft>
-                <a:spcPts val="600"/>
-              </a:spcAft>
-            </a:pPr>
-            <a:r>
-              <a:rPr sz="1500" b="0" i="0">
-                <a:solidFill>
-                  <a:srgbClr val="2B2B2B"/>
-                </a:solidFill>
-                <a:latin typeface="Calibri"/>
-              </a:rPr>
-              <a:t>●   — "Mi innovación es de producto." — "¿Por qué no de proceso?" — silencio.</a:t>
-            </a:r>
-          </a:p>
-          <a:p>
-            <a:pPr lvl="1">
-              <a:spcAft>
-                <a:spcPts val="600"/>
-              </a:spcAft>
-            </a:pPr>
-            <a:r>
-              <a:rPr sz="1500" b="0" i="0">
-                <a:solidFill>
-                  <a:srgbClr val="2B2B2B"/>
-                </a:solidFill>
-                <a:latin typeface="Calibri"/>
-              </a:rPr>
-              <a:t>●   Ese silencio no se llena con más entusiasmo: se llena con </a:t>
-            </a:r>
-            <a:r>
-              <a:rPr sz="1500" b="1" i="0">
-                <a:solidFill>
-                  <a:srgbClr val="2B2B2B"/>
-                </a:solidFill>
-                <a:latin typeface="Calibri"/>
-              </a:rPr>
-              <a:t>criterios</a:t>
-            </a:r>
-            <a:r>
-              <a:rPr sz="1500" b="0" i="0">
-                <a:solidFill>
-                  <a:srgbClr val="2B2B2B"/>
-                </a:solidFill>
-                <a:latin typeface="Calibri"/>
-              </a:rPr>
-              <a:t>.</a:t>
-            </a:r>
-          </a:p>
-          <a:p>
-            <a:pPr>
-              <a:spcAft>
-                <a:spcPts val="1000"/>
-              </a:spcAft>
-            </a:pPr>
-            <a:r>
-              <a:rPr sz="1600" b="0" i="0">
-                <a:solidFill>
-                  <a:srgbClr val="2B2B2B"/>
-                </a:solidFill>
-                <a:latin typeface="Calibri"/>
-              </a:rPr>
-              <a:t>–   Y una segunda escena, igual de común: escribir </a:t>
-            </a:r>
-            <a:r>
-              <a:rPr sz="1600" b="1" i="0">
-                <a:solidFill>
-                  <a:srgbClr val="2B2B2B"/>
-                </a:solidFill>
-                <a:latin typeface="Calibri"/>
-              </a:rPr>
-              <a:t>"mi innovación es radical"</a:t>
-            </a:r>
-            <a:r>
-              <a:rPr sz="1600" b="0" i="0">
-                <a:solidFill>
-                  <a:srgbClr val="2B2B2B"/>
-                </a:solidFill>
-                <a:latin typeface="Calibri"/>
-              </a:rPr>
-              <a:t> como adorno, sin un solo dato.</a:t>
-            </a:r>
-          </a:p>
-          <a:p>
-            <a:pPr lvl="1">
-              <a:spcAft>
-                <a:spcPts val="600"/>
-              </a:spcAft>
-            </a:pPr>
-            <a:r>
-              <a:rPr sz="1500" b="0" i="0">
-                <a:solidFill>
-                  <a:srgbClr val="2B2B2B"/>
-                </a:solidFill>
-                <a:latin typeface="Calibri"/>
-              </a:rPr>
-              <a:t>●   Hoy vamos a ver por qué eso los debilita en vez de fortalecerlos.</a:t>
-            </a:r>
-          </a:p>
-          <a:p>
-            <a:pPr>
-              <a:spcAft>
-                <a:spcPts val="1000"/>
-              </a:spcAft>
-            </a:pPr>
-            <a:r>
-              <a:rPr sz="1600" b="0" i="0">
-                <a:solidFill>
-                  <a:srgbClr val="2B2B2B"/>
-                </a:solidFill>
-                <a:latin typeface="Calibri"/>
-              </a:rPr>
-              <a:t>–   Producto de la hora: una </a:t>
-            </a:r>
-            <a:r>
-              <a:rPr sz="1600" b="1" i="0">
-                <a:solidFill>
-                  <a:srgbClr val="2B2B2B"/>
-                </a:solidFill>
-                <a:latin typeface="Calibri"/>
-              </a:rPr>
-              <a:t>matriz comparativa</a:t>
-            </a:r>
-            <a:r>
-              <a:rPr sz="1600" b="0" i="0">
-                <a:solidFill>
-                  <a:srgbClr val="2B2B2B"/>
-                </a:solidFill>
-                <a:latin typeface="Calibri"/>
-              </a:rPr>
-              <a:t> —su tipo elegido contra una alternativa— con criterios claros y una </a:t>
-            </a:r>
-            <a:r>
-              <a:rPr sz="1600" b="1" i="0">
-                <a:solidFill>
-                  <a:srgbClr val="2B2B2B"/>
-                </a:solidFill>
-                <a:latin typeface="Calibri"/>
-              </a:rPr>
-              <a:t>conclusión escrita de 4 líneas</a:t>
-            </a:r>
-            <a:r>
-              <a:rPr sz="1600" b="0" i="0">
-                <a:solidFill>
-                  <a:srgbClr val="2B2B2B"/>
-                </a:solidFill>
-                <a:latin typeface="Calibri"/>
-              </a:rPr>
-              <a:t>.</a:t>
-            </a:r>
-          </a:p>
-        </p:txBody>
-      </p:sp>
-      <p:sp>
-        <p:nvSpPr>
-          <p:cNvPr id="5" name="TextBox 4"/>
-          <p:cNvSpPr txBox="1"/>
-          <p:nvPr/>
-        </p:nvSpPr>
-        <p:spPr>
-          <a:xfrm>
-            <a:off x="11094415" y="6446520"/>
-            <a:ext cx="548640" cy="274320"/>
-          </a:xfrm>
-          <a:prstGeom prst="rect">
-            <a:avLst/>
-          </a:prstGeom>
-          <a:noFill/>
-        </p:spPr>
-        <p:txBody>
-          <a:bodyPr wrap="square" anchor="t" lIns="0" rIns="0" tIns="0" bIns="0">
-            <a:spAutoFit/>
-          </a:bodyPr>
-          <a:lstStyle/>
-          <a:p>
-            <a:pPr algn="r"/>
-            <a:r>
-              <a:rPr sz="1000" b="1" i="0">
-                <a:solidFill>
-                  <a:srgbClr val="8F989D"/>
-                </a:solidFill>
-                <a:latin typeface="Calibri"/>
-              </a:rPr>
-              <a:t>2</a:t>
             </a:r>
           </a:p>
         </p:txBody>
